--- a/Especializacion/Proyecto I/Clases/Sesion 04 - Retroalimentación del Quiz · Antecedentes de investigación/Presentacion.pptx
+++ b/Especializacion/Proyecto I/Clases/Sesion 04 - Retroalimentación del Quiz · Antecedentes de investigación/Presentacion.pptx
@@ -23,6 +23,8 @@
     <p:sldId id="271" r:id="rId22"/>
     <p:sldId id="272" r:id="rId23"/>
     <p:sldId id="273" r:id="rId24"/>
+    <p:sldId id="274" r:id="rId25"/>
+    <p:sldId id="275" r:id="rId26"/>
   </p:sldIdLst>
   <p:sldSz cx="12191695" cy="6858000" type="screen4x3"/>
   <p:notesSz cx="6858000" cy="9144000"/>
@@ -5868,7 +5870,7 @@
                 </a:solidFill>
                 <a:latin typeface="Calibri"/>
               </a:rPr>
-              <a:t>TALLER (20 minutos) — búsqueda y fichaje</a:t>
+              <a:t>TALLER · Búsqueda y fichaje de antecedentes</a:t>
             </a:r>
           </a:p>
         </p:txBody>
@@ -5881,8 +5883,8 @@
         </p:nvSpPr>
         <p:spPr>
           <a:xfrm>
-            <a:off x="640080" y="1691639"/>
-            <a:ext cx="10911535" cy="4617720"/>
+            <a:off x="640080" y="1280160"/>
+            <a:ext cx="10911535" cy="411480"/>
           </a:xfrm>
           <a:prstGeom prst="rect">
             <a:avLst/>
@@ -5895,6 +5897,41 @@
           </a:bodyPr>
           <a:lstStyle/>
           <a:p>
+            <a:pPr algn="ctr"/>
+            <a:r>
+              <a:rPr sz="1500" b="0" i="0">
+                <a:solidFill>
+                  <a:srgbClr val="2B2B2B"/>
+                </a:solidFill>
+                <a:latin typeface="Calibri"/>
+              </a:rPr>
+              <a:t>Por equipos · el Docente resuelve dudas de términos de búsqueda y de vínculo con la pregunta</a:t>
+            </a:r>
+          </a:p>
+        </p:txBody>
+      </p:sp>
+      <p:sp>
+        <p:nvSpPr>
+          <p:cNvPr id="5" name="TextBox 4"/>
+          <p:cNvSpPr txBox="1"/>
+          <p:nvPr/>
+        </p:nvSpPr>
+        <p:spPr>
+          <a:xfrm>
+            <a:off x="640080" y="2011679"/>
+            <a:ext cx="10911535" cy="4297680"/>
+          </a:xfrm>
+          <a:prstGeom prst="rect">
+            <a:avLst/>
+          </a:prstGeom>
+          <a:noFill/>
+        </p:spPr>
+        <p:txBody>
+          <a:bodyPr wrap="square" anchor="t" lIns="0" rIns="0" tIns="0" bIns="0">
+            <a:spAutoFit/>
+          </a:bodyPr>
+          <a:lstStyle/>
+          <a:p>
             <a:pPr>
               <a:spcAft>
                 <a:spcPts val="1000"/>
@@ -5916,7 +5953,7 @@
                 </a:solidFill>
                 <a:latin typeface="Calibri"/>
               </a:rPr>
-              <a:t>Consigna literal:</a:t>
+              <a:t>Al final tiene:</a:t>
             </a:r>
             <a:r>
               <a:rPr sz="1600" b="0" i="0">
@@ -5925,179 +5962,7 @@
                 </a:solidFill>
                 <a:latin typeface="Calibri"/>
               </a:rPr>
-              <a:t> 20 minutos de búsqueda y fichaje en el documento del equipo.</a:t>
-            </a:r>
-          </a:p>
-          <a:p>
-            <a:pPr lvl="1">
-              <a:spcAft>
-                <a:spcPts val="600"/>
-              </a:spcAft>
-            </a:pPr>
-            <a:r>
-              <a:rPr sz="1500" b="0" i="0">
-                <a:solidFill>
-                  <a:srgbClr val="2B2B2B"/>
-                </a:solidFill>
-                <a:latin typeface="Calibri"/>
-              </a:rPr>
-              <a:t>●   </a:t>
-            </a:r>
-            <a:r>
-              <a:rPr sz="1500" b="1" i="0">
-                <a:solidFill>
-                  <a:srgbClr val="2B2B2B"/>
-                </a:solidFill>
-                <a:latin typeface="Calibri"/>
-              </a:rPr>
-              <a:t>(1)</a:t>
-            </a:r>
-            <a:r>
-              <a:rPr sz="1500" b="0" i="0">
-                <a:solidFill>
-                  <a:srgbClr val="2B2B2B"/>
-                </a:solidFill>
-                <a:latin typeface="Calibri"/>
-              </a:rPr>
-              <a:t> Localicen </a:t>
-            </a:r>
-            <a:r>
-              <a:rPr sz="1500" b="1" i="0">
-                <a:solidFill>
-                  <a:srgbClr val="2B2B2B"/>
-                </a:solidFill>
-                <a:latin typeface="Calibri"/>
-              </a:rPr>
-              <a:t>al menos dos antecedentes</a:t>
-            </a:r>
-            <a:r>
-              <a:rPr sz="1500" b="0" i="0">
-                <a:solidFill>
-                  <a:srgbClr val="2B2B2B"/>
-                </a:solidFill>
-                <a:latin typeface="Calibri"/>
-              </a:rPr>
-              <a:t> nuevos en Google Scholar, SciELO o Redalyc.</a:t>
-            </a:r>
-          </a:p>
-          <a:p>
-            <a:pPr lvl="1">
-              <a:spcAft>
-                <a:spcPts val="600"/>
-              </a:spcAft>
-            </a:pPr>
-            <a:r>
-              <a:rPr sz="1500" b="0" i="0">
-                <a:solidFill>
-                  <a:srgbClr val="2B2B2B"/>
-                </a:solidFill>
-                <a:latin typeface="Calibri"/>
-              </a:rPr>
-              <a:t>●   </a:t>
-            </a:r>
-            <a:r>
-              <a:rPr sz="1500" b="1" i="0">
-                <a:solidFill>
-                  <a:srgbClr val="2B2B2B"/>
-                </a:solidFill>
-                <a:latin typeface="Calibri"/>
-              </a:rPr>
-              <a:t>(2)</a:t>
-            </a:r>
-            <a:r>
-              <a:rPr sz="1500" b="0" i="0">
-                <a:solidFill>
-                  <a:srgbClr val="2B2B2B"/>
-                </a:solidFill>
-                <a:latin typeface="Calibri"/>
-              </a:rPr>
-              <a:t> Al menos uno debe ser </a:t>
-            </a:r>
-            <a:r>
-              <a:rPr sz="1500" b="1" i="0">
-                <a:solidFill>
-                  <a:srgbClr val="2B2B2B"/>
-                </a:solidFill>
-                <a:latin typeface="Calibri"/>
-              </a:rPr>
-              <a:t>latinoamericano o colombiano</a:t>
-            </a:r>
-            <a:r>
-              <a:rPr sz="1500" b="0" i="0">
-                <a:solidFill>
-                  <a:srgbClr val="2B2B2B"/>
-                </a:solidFill>
-                <a:latin typeface="Calibri"/>
-              </a:rPr>
-              <a:t>.</a:t>
-            </a:r>
-          </a:p>
-          <a:p>
-            <a:pPr lvl="1">
-              <a:spcAft>
-                <a:spcPts val="600"/>
-              </a:spcAft>
-            </a:pPr>
-            <a:r>
-              <a:rPr sz="1500" b="0" i="0">
-                <a:solidFill>
-                  <a:srgbClr val="2B2B2B"/>
-                </a:solidFill>
-                <a:latin typeface="Calibri"/>
-              </a:rPr>
-              <a:t>●   </a:t>
-            </a:r>
-            <a:r>
-              <a:rPr sz="1500" b="1" i="0">
-                <a:solidFill>
-                  <a:srgbClr val="2B2B2B"/>
-                </a:solidFill>
-                <a:latin typeface="Calibri"/>
-              </a:rPr>
-              <a:t>(3)</a:t>
-            </a:r>
-            <a:r>
-              <a:rPr sz="1500" b="0" i="0">
-                <a:solidFill>
-                  <a:srgbClr val="2B2B2B"/>
-                </a:solidFill>
-                <a:latin typeface="Calibri"/>
-              </a:rPr>
-              <a:t> Llenen la ficha de cinco casillas de cada uno, con la casilla 5 redactada por ustedes.</a:t>
-            </a:r>
-          </a:p>
-          <a:p>
-            <a:pPr lvl="1">
-              <a:spcAft>
-                <a:spcPts val="600"/>
-              </a:spcAft>
-            </a:pPr>
-            <a:r>
-              <a:rPr sz="1500" b="0" i="0">
-                <a:solidFill>
-                  <a:srgbClr val="2B2B2B"/>
-                </a:solidFill>
-                <a:latin typeface="Calibri"/>
-              </a:rPr>
-              <a:t>●   </a:t>
-            </a:r>
-            <a:r>
-              <a:rPr sz="1500" b="1" i="0">
-                <a:solidFill>
-                  <a:srgbClr val="2B2B2B"/>
-                </a:solidFill>
-                <a:latin typeface="Calibri"/>
-              </a:rPr>
-              <a:t>(4)</a:t>
-            </a:r>
-            <a:r>
-              <a:rPr sz="1500" b="0" i="0">
-                <a:solidFill>
-                  <a:srgbClr val="2B2B2B"/>
-                </a:solidFill>
-                <a:latin typeface="Calibri"/>
-              </a:rPr>
-              <a:t> Generen las dos referencias en APA 7 con ZoteroBib y péguenlas al final del documento.</a:t>
+              <a:t> al menos dos antecedentes nuevos fichados y sus dos referencias en APA 7.</a:t>
             </a:r>
           </a:p>
           <a:p>
@@ -6113,7 +5978,43 @@
                 </a:solidFill>
                 <a:latin typeface="Calibri"/>
               </a:rPr>
-              <a:t>–   El Docente pasa resolviendo dudas de términos de búsqueda y de vínculo con la pregunta.</a:t>
+              <a:t>–   </a:t>
+            </a:r>
+            <a:r>
+              <a:rPr sz="1600" b="1" i="0">
+                <a:solidFill>
+                  <a:srgbClr val="2B2B2B"/>
+                </a:solidFill>
+                <a:latin typeface="Calibri"/>
+              </a:rPr>
+              <a:t>Paso 1</a:t>
+            </a:r>
+            <a:r>
+              <a:rPr sz="1600" b="0" i="0">
+                <a:solidFill>
+                  <a:srgbClr val="2B2B2B"/>
+                </a:solidFill>
+                <a:latin typeface="Calibri"/>
+              </a:rPr>
+              <a:t> · Localicen </a:t>
+            </a:r>
+            <a:r>
+              <a:rPr sz="1600" b="1" i="0">
+                <a:solidFill>
+                  <a:srgbClr val="2B2B2B"/>
+                </a:solidFill>
+                <a:latin typeface="Calibri"/>
+              </a:rPr>
+              <a:t>al menos dos antecedentes</a:t>
+            </a:r>
+            <a:r>
+              <a:rPr sz="1600" b="0" i="0">
+                <a:solidFill>
+                  <a:srgbClr val="2B2B2B"/>
+                </a:solidFill>
+                <a:latin typeface="Calibri"/>
+              </a:rPr>
+              <a:t> nuevos en Google Scholar, SciELO o Redalyc.</a:t>
             </a:r>
           </a:p>
           <a:p>
@@ -6138,7 +6039,7 @@
                 </a:solidFill>
                 <a:latin typeface="Calibri"/>
               </a:rPr>
-              <a:t>Criterio de éxito (verificable):</a:t>
+              <a:t>Paso 2</a:t>
             </a:r>
             <a:r>
               <a:rPr sz="1600" b="0" i="0">
@@ -6147,7 +6048,7 @@
                 </a:solidFill>
                 <a:latin typeface="Calibri"/>
               </a:rPr>
-              <a:t> al leer cada ficha queda claro </a:t>
+              <a:t> · Al menos uno debe ser </a:t>
             </a:r>
             <a:r>
               <a:rPr sz="1600" b="1" i="0">
@@ -6156,7 +6057,7 @@
                 </a:solidFill>
                 <a:latin typeface="Calibri"/>
               </a:rPr>
-              <a:t>qué método usó el estudio</a:t>
+              <a:t>latinoamericano o colombiano</a:t>
             </a:r>
             <a:r>
               <a:rPr sz="1600" b="0" i="0">
@@ -6165,48 +6066,170 @@
                 </a:solidFill>
                 <a:latin typeface="Calibri"/>
               </a:rPr>
-              <a:t> y </a:t>
-            </a:r>
-            <a:r>
-              <a:rPr sz="1600" b="1" i="0">
-                <a:solidFill>
-                  <a:srgbClr val="2B2B2B"/>
-                </a:solidFill>
-                <a:latin typeface="Calibri"/>
-              </a:rPr>
-              <a:t>por qué le sirve a esta pregunta</a:t>
-            </a:r>
-            <a:r>
-              <a:rPr sz="1600" b="0" i="0">
-                <a:solidFill>
-                  <a:srgbClr val="2B2B2B"/>
-                </a:solidFill>
-                <a:latin typeface="Calibri"/>
-              </a:rPr>
               <a:t>.</a:t>
             </a:r>
           </a:p>
           <a:p>
-            <a:pPr lvl="1">
+            <a:pPr>
               <a:spcAft>
-                <a:spcPts val="600"/>
+                <a:spcPts val="1000"/>
               </a:spcAft>
             </a:pPr>
             <a:r>
-              <a:rPr sz="1500" b="0" i="0">
-                <a:solidFill>
-                  <a:srgbClr val="2B2B2B"/>
-                </a:solidFill>
-                <a:latin typeface="Calibri"/>
-              </a:rPr>
-              <a:t>●   Van rumbo a seis: dos hoy, el resto en trabajo autónomo.</a:t>
-            </a:r>
-          </a:p>
-        </p:txBody>
-      </p:sp>
-      <p:sp>
-        <p:nvSpPr>
-          <p:cNvPr id="5" name="TextBox 4"/>
+              <a:rPr sz="1600" b="0" i="0">
+                <a:solidFill>
+                  <a:srgbClr val="2B2B2B"/>
+                </a:solidFill>
+                <a:latin typeface="Calibri"/>
+              </a:rPr>
+              <a:t>–   </a:t>
+            </a:r>
+            <a:r>
+              <a:rPr sz="1600" b="1" i="0">
+                <a:solidFill>
+                  <a:srgbClr val="2B2B2B"/>
+                </a:solidFill>
+                <a:latin typeface="Calibri"/>
+              </a:rPr>
+              <a:t>Paso 3</a:t>
+            </a:r>
+            <a:r>
+              <a:rPr sz="1600" b="0" i="0">
+                <a:solidFill>
+                  <a:srgbClr val="2B2B2B"/>
+                </a:solidFill>
+                <a:latin typeface="Calibri"/>
+              </a:rPr>
+              <a:t> · Llenen la </a:t>
+            </a:r>
+            <a:r>
+              <a:rPr sz="1600" b="1" i="0">
+                <a:solidFill>
+                  <a:srgbClr val="2B2B2B"/>
+                </a:solidFill>
+                <a:latin typeface="Calibri"/>
+              </a:rPr>
+              <a:t>ficha de cinco casillas</a:t>
+            </a:r>
+            <a:r>
+              <a:rPr sz="1600" b="0" i="0">
+                <a:solidFill>
+                  <a:srgbClr val="2B2B2B"/>
+                </a:solidFill>
+                <a:latin typeface="Calibri"/>
+              </a:rPr>
+              <a:t> de cada uno, con la casilla 5 redactada por ustedes.</a:t>
+            </a:r>
+          </a:p>
+          <a:p>
+            <a:pPr>
+              <a:spcAft>
+                <a:spcPts val="1000"/>
+              </a:spcAft>
+            </a:pPr>
+            <a:r>
+              <a:rPr sz="1600" b="0" i="0">
+                <a:solidFill>
+                  <a:srgbClr val="2B2B2B"/>
+                </a:solidFill>
+                <a:latin typeface="Calibri"/>
+              </a:rPr>
+              <a:t>–   </a:t>
+            </a:r>
+            <a:r>
+              <a:rPr sz="1600" b="1" i="0">
+                <a:solidFill>
+                  <a:srgbClr val="2B2B2B"/>
+                </a:solidFill>
+                <a:latin typeface="Calibri"/>
+              </a:rPr>
+              <a:t>Paso 4</a:t>
+            </a:r>
+            <a:r>
+              <a:rPr sz="1600" b="0" i="0">
+                <a:solidFill>
+                  <a:srgbClr val="2B2B2B"/>
+                </a:solidFill>
+                <a:latin typeface="Calibri"/>
+              </a:rPr>
+              <a:t> · Generen las dos referencias en </a:t>
+            </a:r>
+            <a:r>
+              <a:rPr sz="1600" b="1" i="0">
+                <a:solidFill>
+                  <a:srgbClr val="2B2B2B"/>
+                </a:solidFill>
+                <a:latin typeface="Calibri"/>
+              </a:rPr>
+              <a:t>APA 7</a:t>
+            </a:r>
+            <a:r>
+              <a:rPr sz="1600" b="0" i="0">
+                <a:solidFill>
+                  <a:srgbClr val="2B2B2B"/>
+                </a:solidFill>
+                <a:latin typeface="Calibri"/>
+              </a:rPr>
+              <a:t> con ZoteroBib y péguenlas al final del documento.</a:t>
+            </a:r>
+          </a:p>
+          <a:p>
+            <a:pPr>
+              <a:spcAft>
+                <a:spcPts val="1000"/>
+              </a:spcAft>
+            </a:pPr>
+            <a:r>
+              <a:rPr sz="1600" b="0" i="0">
+                <a:solidFill>
+                  <a:srgbClr val="2B2B2B"/>
+                </a:solidFill>
+                <a:latin typeface="Calibri"/>
+              </a:rPr>
+              <a:t>–   </a:t>
+            </a:r>
+            <a:r>
+              <a:rPr sz="1600" b="1" i="0">
+                <a:solidFill>
+                  <a:srgbClr val="2B2B2B"/>
+                </a:solidFill>
+                <a:latin typeface="Calibri"/>
+              </a:rPr>
+              <a:t>En clase, sin falta:</a:t>
+            </a:r>
+            <a:r>
+              <a:rPr sz="1600" b="0" i="0">
+                <a:solidFill>
+                  <a:srgbClr val="2B2B2B"/>
+                </a:solidFill>
+                <a:latin typeface="Calibri"/>
+              </a:rPr>
+              <a:t> los </a:t>
+            </a:r>
+            <a:r>
+              <a:rPr sz="1600" b="1" i="0">
+                <a:solidFill>
+                  <a:srgbClr val="2B2B2B"/>
+                </a:solidFill>
+                <a:latin typeface="Calibri"/>
+              </a:rPr>
+              <a:t>pasos 1 a 3</a:t>
+            </a:r>
+            <a:r>
+              <a:rPr sz="1600" b="0" i="0">
+                <a:solidFill>
+                  <a:srgbClr val="2B2B2B"/>
+                </a:solidFill>
+                <a:latin typeface="Calibri"/>
+              </a:rPr>
+              <a:t>. Del 4 en adelante puede quedar en trabajo autónomo, pero antes de la próxima sesión.</a:t>
+            </a:r>
+          </a:p>
+        </p:txBody>
+      </p:sp>
+      <p:sp>
+        <p:nvSpPr>
+          <p:cNvPr id="6" name="TextBox 5"/>
           <p:cNvSpPr txBox="1"/>
           <p:nvPr/>
         </p:nvSpPr>
@@ -6235,40 +6258,6 @@
                 <a:latin typeface="Calibri"/>
               </a:rPr>
               <a:t>15</a:t>
-            </a:r>
-          </a:p>
-        </p:txBody>
-      </p:sp>
-      <p:sp>
-        <p:nvSpPr>
-          <p:cNvPr id="6" name="TextBox 5"/>
-          <p:cNvSpPr txBox="1"/>
-          <p:nvPr/>
-        </p:nvSpPr>
-        <p:spPr>
-          <a:xfrm>
-            <a:off x="640080" y="5943600"/>
-            <a:ext cx="9997135" cy="457200"/>
-          </a:xfrm>
-          <a:prstGeom prst="rect">
-            <a:avLst/>
-          </a:prstGeom>
-          <a:noFill/>
-        </p:spPr>
-        <p:txBody>
-          <a:bodyPr wrap="square" anchor="t" lIns="0" rIns="0" tIns="0" bIns="0">
-            <a:spAutoFit/>
-          </a:bodyPr>
-          <a:lstStyle/>
-          <a:p>
-            <a:r>
-              <a:rPr sz="1200" b="0" i="1">
-                <a:solidFill>
-                  <a:srgbClr val="2B2B2B"/>
-                </a:solidFill>
-                <a:latin typeface="Calibri"/>
-              </a:rPr>
-              <a:t>Si en 20 minutos consiguen solo un antecedente bien fichado, eso vale más que cinco enlaces pegados sin leer.</a:t>
             </a:r>
           </a:p>
         </p:txBody>
@@ -6373,6 +6362,532 @@
                 </a:solidFill>
                 <a:latin typeface="Calibri"/>
               </a:rPr>
+              <a:t>TALLER · cómo se revisa y dónde se entrega</a:t>
+            </a:r>
+          </a:p>
+        </p:txBody>
+      </p:sp>
+      <p:sp>
+        <p:nvSpPr>
+          <p:cNvPr id="4" name="TextBox 3"/>
+          <p:cNvSpPr txBox="1"/>
+          <p:nvPr/>
+        </p:nvSpPr>
+        <p:spPr>
+          <a:xfrm>
+            <a:off x="640080" y="1280160"/>
+            <a:ext cx="10911535" cy="411480"/>
+          </a:xfrm>
+          <a:prstGeom prst="rect">
+            <a:avLst/>
+          </a:prstGeom>
+          <a:noFill/>
+        </p:spPr>
+        <p:txBody>
+          <a:bodyPr wrap="square" anchor="t" lIns="0" rIns="0" tIns="0" bIns="0">
+            <a:spAutoFit/>
+          </a:bodyPr>
+          <a:lstStyle/>
+          <a:p>
+            <a:pPr algn="ctr"/>
+            <a:r>
+              <a:rPr sz="1500" b="0" i="0">
+                <a:solidFill>
+                  <a:srgbClr val="2B2B2B"/>
+                </a:solidFill>
+                <a:latin typeface="Calibri"/>
+              </a:rPr>
+              <a:t>Búsqueda y fichaje de antecedentes</a:t>
+            </a:r>
+          </a:p>
+        </p:txBody>
+      </p:sp>
+      <p:sp>
+        <p:nvSpPr>
+          <p:cNvPr id="5" name="TextBox 4"/>
+          <p:cNvSpPr txBox="1"/>
+          <p:nvPr/>
+        </p:nvSpPr>
+        <p:spPr>
+          <a:xfrm>
+            <a:off x="640080" y="2011679"/>
+            <a:ext cx="10911535" cy="4297680"/>
+          </a:xfrm>
+          <a:prstGeom prst="rect">
+            <a:avLst/>
+          </a:prstGeom>
+          <a:noFill/>
+        </p:spPr>
+        <p:txBody>
+          <a:bodyPr wrap="square" anchor="t" lIns="0" rIns="0" tIns="0" bIns="0">
+            <a:spAutoFit/>
+          </a:bodyPr>
+          <a:lstStyle/>
+          <a:p>
+            <a:pPr>
+              <a:spcAft>
+                <a:spcPts val="1000"/>
+              </a:spcAft>
+            </a:pPr>
+            <a:r>
+              <a:rPr sz="1600" b="0" i="0">
+                <a:solidFill>
+                  <a:srgbClr val="2B2B2B"/>
+                </a:solidFill>
+                <a:latin typeface="Calibri"/>
+              </a:rPr>
+              <a:t>–   </a:t>
+            </a:r>
+            <a:r>
+              <a:rPr sz="1600" b="1" i="0">
+                <a:solidFill>
+                  <a:srgbClr val="2B2B2B"/>
+                </a:solidFill>
+                <a:latin typeface="Calibri"/>
+              </a:rPr>
+              <a:t>Quedó bien si</a:t>
+            </a:r>
+            <a:r>
+              <a:rPr sz="1600" b="0" i="0">
+                <a:solidFill>
+                  <a:srgbClr val="2B2B2B"/>
+                </a:solidFill>
+                <a:latin typeface="Calibri"/>
+              </a:rPr>
+              <a:t> —compruébelo usted antes de cerrar el documento—:</a:t>
+            </a:r>
+          </a:p>
+          <a:p>
+            <a:pPr lvl="1">
+              <a:spcAft>
+                <a:spcPts val="600"/>
+              </a:spcAft>
+            </a:pPr>
+            <a:r>
+              <a:rPr sz="1500" b="0" i="0">
+                <a:solidFill>
+                  <a:srgbClr val="2B2B2B"/>
+                </a:solidFill>
+                <a:latin typeface="Calibri"/>
+              </a:rPr>
+              <a:t>●   Al leer cada ficha queda claro </a:t>
+            </a:r>
+            <a:r>
+              <a:rPr sz="1500" b="1" i="0">
+                <a:solidFill>
+                  <a:srgbClr val="2B2B2B"/>
+                </a:solidFill>
+                <a:latin typeface="Calibri"/>
+              </a:rPr>
+              <a:t>qué método usó el estudio</a:t>
+            </a:r>
+            <a:r>
+              <a:rPr sz="1500" b="0" i="0">
+                <a:solidFill>
+                  <a:srgbClr val="2B2B2B"/>
+                </a:solidFill>
+                <a:latin typeface="Calibri"/>
+              </a:rPr>
+              <a:t>.</a:t>
+            </a:r>
+          </a:p>
+          <a:p>
+            <a:pPr lvl="1">
+              <a:spcAft>
+                <a:spcPts val="600"/>
+              </a:spcAft>
+            </a:pPr>
+            <a:r>
+              <a:rPr sz="1500" b="0" i="0">
+                <a:solidFill>
+                  <a:srgbClr val="2B2B2B"/>
+                </a:solidFill>
+                <a:latin typeface="Calibri"/>
+              </a:rPr>
+              <a:t>●   Y queda claro </a:t>
+            </a:r>
+            <a:r>
+              <a:rPr sz="1500" b="1" i="0">
+                <a:solidFill>
+                  <a:srgbClr val="2B2B2B"/>
+                </a:solidFill>
+                <a:latin typeface="Calibri"/>
+              </a:rPr>
+              <a:t>por qué le sirve a esta pregunta</a:t>
+            </a:r>
+            <a:r>
+              <a:rPr sz="1500" b="0" i="0">
+                <a:solidFill>
+                  <a:srgbClr val="2B2B2B"/>
+                </a:solidFill>
+                <a:latin typeface="Calibri"/>
+              </a:rPr>
+              <a:t>.</a:t>
+            </a:r>
+          </a:p>
+          <a:p>
+            <a:pPr lvl="1">
+              <a:spcAft>
+                <a:spcPts val="600"/>
+              </a:spcAft>
+            </a:pPr>
+            <a:r>
+              <a:rPr sz="1500" b="0" i="0">
+                <a:solidFill>
+                  <a:srgbClr val="2B2B2B"/>
+                </a:solidFill>
+                <a:latin typeface="Calibri"/>
+              </a:rPr>
+              <a:t>●   Van rumbo a seis: dos hoy, el resto en trabajo autónomo.</a:t>
+            </a:r>
+          </a:p>
+          <a:p>
+            <a:pPr>
+              <a:spcAft>
+                <a:spcPts val="1000"/>
+              </a:spcAft>
+            </a:pPr>
+            <a:r>
+              <a:rPr sz="1600" b="0" i="0">
+                <a:solidFill>
+                  <a:srgbClr val="2B2B2B"/>
+                </a:solidFill>
+                <a:latin typeface="Calibri"/>
+              </a:rPr>
+              <a:t>–   </a:t>
+            </a:r>
+            <a:r>
+              <a:rPr sz="1600" b="1" i="0">
+                <a:solidFill>
+                  <a:srgbClr val="2B2B2B"/>
+                </a:solidFill>
+                <a:latin typeface="Calibri"/>
+              </a:rPr>
+              <a:t>Plan B:</a:t>
+            </a:r>
+            <a:r>
+              <a:rPr sz="1600" b="0" i="0">
+                <a:solidFill>
+                  <a:srgbClr val="2B2B2B"/>
+                </a:solidFill>
+                <a:latin typeface="Calibri"/>
+              </a:rPr>
+              <a:t> Si una búsqueda no da nada en tres intentos, cambie una palabra clave. Y si en el taller consiguen </a:t>
+            </a:r>
+            <a:r>
+              <a:rPr sz="1600" b="1" i="0">
+                <a:solidFill>
+                  <a:srgbClr val="2B2B2B"/>
+                </a:solidFill>
+                <a:latin typeface="Calibri"/>
+              </a:rPr>
+              <a:t>solo un</a:t>
+            </a:r>
+            <a:r>
+              <a:rPr sz="1600" b="0" i="0">
+                <a:solidFill>
+                  <a:srgbClr val="2B2B2B"/>
+                </a:solidFill>
+                <a:latin typeface="Calibri"/>
+              </a:rPr>
+              <a:t> antecedente bien fichado, eso vale más que cinco enlaces pegados sin leer.</a:t>
+            </a:r>
+          </a:p>
+          <a:p>
+            <a:pPr>
+              <a:spcAft>
+                <a:spcPts val="1000"/>
+              </a:spcAft>
+            </a:pPr>
+            <a:r>
+              <a:rPr sz="1600" b="0" i="0">
+                <a:solidFill>
+                  <a:srgbClr val="2B2B2B"/>
+                </a:solidFill>
+                <a:latin typeface="Calibri"/>
+              </a:rPr>
+              <a:t>–   </a:t>
+            </a:r>
+            <a:r>
+              <a:rPr sz="1600" b="1" i="0">
+                <a:solidFill>
+                  <a:srgbClr val="2B2B2B"/>
+                </a:solidFill>
+                <a:latin typeface="Calibri"/>
+              </a:rPr>
+              <a:t>Hoy no se sube nada al aula:</a:t>
+            </a:r>
+            <a:r>
+              <a:rPr sz="1600" b="0" i="0">
+                <a:solidFill>
+                  <a:srgbClr val="2B2B2B"/>
+                </a:solidFill>
+                <a:latin typeface="Calibri"/>
+              </a:rPr>
+              <a:t> guarde `S04_Antecedentes_Apellidos` (Google Doc o PDF) en su Drive y tráigalo a la próxima sesión. Es un </a:t>
+            </a:r>
+            <a:r>
+              <a:rPr sz="1600" b="1" i="0">
+                <a:solidFill>
+                  <a:srgbClr val="2B2B2B"/>
+                </a:solidFill>
+                <a:latin typeface="Calibri"/>
+              </a:rPr>
+              <a:t>avance formativo</a:t>
+            </a:r>
+            <a:r>
+              <a:rPr sz="1600" b="0" i="0">
+                <a:solidFill>
+                  <a:srgbClr val="2B2B2B"/>
+                </a:solidFill>
+                <a:latin typeface="Calibri"/>
+              </a:rPr>
+              <a:t>, se revisa en clase.</a:t>
+            </a:r>
+          </a:p>
+          <a:p>
+            <a:pPr>
+              <a:spcAft>
+                <a:spcPts val="1000"/>
+              </a:spcAft>
+            </a:pPr>
+            <a:r>
+              <a:rPr sz="1600" b="0" i="0">
+                <a:solidFill>
+                  <a:srgbClr val="2B2B2B"/>
+                </a:solidFill>
+                <a:latin typeface="Calibri"/>
+              </a:rPr>
+              <a:t>–   </a:t>
+            </a:r>
+            <a:r>
+              <a:rPr sz="1600" b="1" i="0">
+                <a:solidFill>
+                  <a:srgbClr val="2B2B2B"/>
+                </a:solidFill>
+                <a:latin typeface="Calibri"/>
+              </a:rPr>
+              <a:t>Esto alimenta:</a:t>
+            </a:r>
+            <a:r>
+              <a:rPr sz="1600" b="0" i="0">
+                <a:solidFill>
+                  <a:srgbClr val="2B2B2B"/>
+                </a:solidFill>
+                <a:latin typeface="Calibri"/>
+              </a:rPr>
+              <a:t> </a:t>
+            </a:r>
+            <a:r>
+              <a:rPr sz="1600" b="1" i="0">
+                <a:solidFill>
+                  <a:srgbClr val="2B2B2B"/>
+                </a:solidFill>
+                <a:latin typeface="Calibri"/>
+              </a:rPr>
+              <a:t>ACA 1</a:t>
+            </a:r>
+            <a:r>
+              <a:rPr sz="1600" b="0" i="0">
+                <a:solidFill>
+                  <a:srgbClr val="2B2B2B"/>
+                </a:solidFill>
+                <a:latin typeface="Calibri"/>
+              </a:rPr>
+              <a:t> —tarea, 25%—, el documento que </a:t>
+            </a:r>
+            <a:r>
+              <a:rPr sz="1600" b="1" i="0">
+                <a:solidFill>
+                  <a:srgbClr val="2B2B2B"/>
+                </a:solidFill>
+                <a:latin typeface="Calibri"/>
+              </a:rPr>
+              <a:t>sí</a:t>
+            </a:r>
+            <a:r>
+              <a:rPr sz="1600" b="0" i="0">
+                <a:solidFill>
+                  <a:srgbClr val="2B2B2B"/>
+                </a:solidFill>
+                <a:latin typeface="Calibri"/>
+              </a:rPr>
+              <a:t> recibe </a:t>
+            </a:r>
+            <a:r>
+              <a:rPr sz="1600" b="1" i="0">
+                <a:solidFill>
+                  <a:srgbClr val="2B2B2B"/>
+                </a:solidFill>
+                <a:latin typeface="Calibri"/>
+              </a:rPr>
+              <a:t>CDigital</a:t>
+            </a:r>
+            <a:r>
+              <a:rPr sz="1600" b="0" i="0">
+                <a:solidFill>
+                  <a:srgbClr val="2B2B2B"/>
+                </a:solidFill>
+                <a:latin typeface="Calibri"/>
+              </a:rPr>
+              <a:t>; cierra en la semana de la </a:t>
+            </a:r>
+            <a:r>
+              <a:rPr sz="1600" b="1" i="0">
+                <a:solidFill>
+                  <a:srgbClr val="2B2B2B"/>
+                </a:solidFill>
+                <a:latin typeface="Calibri"/>
+              </a:rPr>
+              <a:t>Sesión 07</a:t>
+            </a:r>
+            <a:r>
+              <a:rPr sz="1600" b="0" i="0">
+                <a:solidFill>
+                  <a:srgbClr val="2B2B2B"/>
+                </a:solidFill>
+                <a:latin typeface="Calibri"/>
+              </a:rPr>
+              <a:t>.</a:t>
+            </a:r>
+          </a:p>
+        </p:txBody>
+      </p:sp>
+      <p:sp>
+        <p:nvSpPr>
+          <p:cNvPr id="6" name="TextBox 5"/>
+          <p:cNvSpPr txBox="1"/>
+          <p:nvPr/>
+        </p:nvSpPr>
+        <p:spPr>
+          <a:xfrm>
+            <a:off x="11094415" y="6446520"/>
+            <a:ext cx="548640" cy="274320"/>
+          </a:xfrm>
+          <a:prstGeom prst="rect">
+            <a:avLst/>
+          </a:prstGeom>
+          <a:noFill/>
+        </p:spPr>
+        <p:txBody>
+          <a:bodyPr wrap="square" anchor="t" lIns="0" rIns="0" tIns="0" bIns="0">
+            <a:spAutoFit/>
+          </a:bodyPr>
+          <a:lstStyle/>
+          <a:p>
+            <a:pPr algn="r"/>
+            <a:r>
+              <a:rPr sz="1000" b="1" i="0">
+                <a:solidFill>
+                  <a:srgbClr val="8F989D"/>
+                </a:solidFill>
+                <a:latin typeface="Calibri"/>
+              </a:rPr>
+              <a:t>16</a:t>
+            </a:r>
+          </a:p>
+        </p:txBody>
+      </p:sp>
+    </p:spTree>
+  </p:cSld>
+  <p:clrMapOvr>
+    <a:masterClrMapping/>
+  </p:clrMapOvr>
+</p:sld>
+</file>
+
+<file path=ppt/slides/slide17.xml><?xml version="1.0" encoding="utf-8"?>
+<p:sld xmlns:a="http://schemas.openxmlformats.org/drawingml/2006/main" xmlns:p="http://schemas.openxmlformats.org/presentationml/2006/main" xmlns:r="http://schemas.openxmlformats.org/officeDocument/2006/relationships">
+  <p:cSld>
+    <p:bg>
+      <p:bgPr>
+        <a:solidFill>
+          <a:srgbClr val="FFFFFF"/>
+        </a:solidFill>
+        <a:effectLst/>
+      </p:bgPr>
+    </p:bg>
+    <p:spTree>
+      <p:nvGrpSpPr>
+        <p:cNvPr id="1" name=""/>
+        <p:cNvGrpSpPr/>
+        <p:nvPr/>
+      </p:nvGrpSpPr>
+      <p:grpSpPr/>
+      <p:sp>
+        <p:nvSpPr>
+          <p:cNvPr id="2" name="Rectangle 1"/>
+          <p:cNvSpPr/>
+          <p:nvPr/>
+        </p:nvSpPr>
+        <p:spPr>
+          <a:xfrm>
+            <a:off x="0" y="0"/>
+            <a:ext cx="12191695" cy="1188720"/>
+          </a:xfrm>
+          <a:prstGeom prst="rect">
+            <a:avLst/>
+          </a:prstGeom>
+          <a:solidFill>
+            <a:srgbClr val="0C2340"/>
+          </a:solidFill>
+          <a:ln>
+            <a:noFill/>
+          </a:ln>
+          <a:effectLst/>
+        </p:spPr>
+        <p:style>
+          <a:lnRef idx="1">
+            <a:schemeClr val="accent1"/>
+          </a:lnRef>
+          <a:fillRef idx="3">
+            <a:schemeClr val="accent1"/>
+          </a:fillRef>
+          <a:effectRef idx="2">
+            <a:schemeClr val="accent1"/>
+          </a:effectRef>
+          <a:fontRef idx="minor">
+            <a:schemeClr val="lt1"/>
+          </a:fontRef>
+        </p:style>
+        <p:txBody>
+          <a:bodyPr rtlCol="0" anchor="ctr"/>
+          <a:lstStyle/>
+          <a:p>
+            <a:pPr algn="ctr"/>
+          </a:p>
+        </p:txBody>
+      </p:sp>
+      <p:sp>
+        <p:nvSpPr>
+          <p:cNvPr id="3" name="TextBox 2"/>
+          <p:cNvSpPr txBox="1"/>
+          <p:nvPr/>
+        </p:nvSpPr>
+        <p:spPr>
+          <a:xfrm>
+            <a:off x="640080" y="0"/>
+            <a:ext cx="9082735" cy="1188720"/>
+          </a:xfrm>
+          <a:prstGeom prst="rect">
+            <a:avLst/>
+          </a:prstGeom>
+          <a:noFill/>
+        </p:spPr>
+        <p:txBody>
+          <a:bodyPr wrap="square" anchor="ctr" lIns="0" rIns="0" tIns="0" bIns="0">
+            <a:spAutoFit/>
+          </a:bodyPr>
+          <a:lstStyle/>
+          <a:p>
+            <a:pPr algn="ctr"/>
+            <a:r>
+              <a:rPr sz="2600" b="1" i="0">
+                <a:solidFill>
+                  <a:srgbClr val="FFFFFF"/>
+                </a:solidFill>
+                <a:latin typeface="Calibri"/>
+              </a:rPr>
               <a:t>Checklist de autoevaluación antes de subir el avance</a:t>
             </a:r>
           </a:p>
@@ -7108,7 +7623,7 @@
                 </a:solidFill>
                 <a:latin typeface="Calibri"/>
               </a:rPr>
-              <a:t>16</a:t>
+              <a:t>17</a:t>
             </a:r>
           </a:p>
         </p:txBody>
@@ -7121,7 +7636,7 @@
 </p:sld>
 </file>
 
-<file path=ppt/slides/slide17.xml><?xml version="1.0" encoding="utf-8"?>
+<file path=ppt/slides/slide18.xml><?xml version="1.0" encoding="utf-8"?>
 <p:sld xmlns:a="http://schemas.openxmlformats.org/drawingml/2006/main" xmlns:p="http://schemas.openxmlformats.org/presentationml/2006/main" xmlns:r="http://schemas.openxmlformats.org/officeDocument/2006/relationships">
   <p:cSld>
     <p:bg>
@@ -7543,7 +8058,7 @@
                 </a:solidFill>
                 <a:latin typeface="Calibri"/>
               </a:rPr>
-              <a:t>17</a:t>
+              <a:t>18</a:t>
             </a:r>
           </a:p>
         </p:txBody>
@@ -7577,7 +8092,7 @@
                 </a:solidFill>
                 <a:latin typeface="Calibri"/>
               </a:rPr>
-              <a:t>Las tutorías por equipo se acuerdan con el Docente durante la semana. [URL CDigital — campus del curso pendiente]</a:t>
+              <a:t>Las tutorías por equipo se acuerdan con el Docente durante la semana. https://cdigital.cun.edu.co/course/view.php?id=130378</a:t>
             </a:r>
           </a:p>
         </p:txBody>
@@ -7590,7 +8105,1275 @@
 </p:sld>
 </file>
 
-<file path=ppt/slides/slide18.xml><?xml version="1.0" encoding="utf-8"?>
+<file path=ppt/slides/slide19.xml><?xml version="1.0" encoding="utf-8"?>
+<p:sld xmlns:a="http://schemas.openxmlformats.org/drawingml/2006/main" xmlns:p="http://schemas.openxmlformats.org/presentationml/2006/main" xmlns:r="http://schemas.openxmlformats.org/officeDocument/2006/relationships">
+  <p:cSld>
+    <p:bg>
+      <p:bgPr>
+        <a:solidFill>
+          <a:srgbClr val="FFFFFF"/>
+        </a:solidFill>
+        <a:effectLst/>
+      </p:bgPr>
+    </p:bg>
+    <p:spTree>
+      <p:nvGrpSpPr>
+        <p:cNvPr id="1" name=""/>
+        <p:cNvGrpSpPr/>
+        <p:nvPr/>
+      </p:nvGrpSpPr>
+      <p:grpSpPr/>
+      <p:sp>
+        <p:nvSpPr>
+          <p:cNvPr id="2" name="Rectangle 1"/>
+          <p:cNvSpPr/>
+          <p:nvPr/>
+        </p:nvSpPr>
+        <p:spPr>
+          <a:xfrm>
+            <a:off x="0" y="0"/>
+            <a:ext cx="12191695" cy="1188720"/>
+          </a:xfrm>
+          <a:prstGeom prst="rect">
+            <a:avLst/>
+          </a:prstGeom>
+          <a:solidFill>
+            <a:srgbClr val="0C2340"/>
+          </a:solidFill>
+          <a:ln>
+            <a:noFill/>
+          </a:ln>
+          <a:effectLst/>
+        </p:spPr>
+        <p:style>
+          <a:lnRef idx="1">
+            <a:schemeClr val="accent1"/>
+          </a:lnRef>
+          <a:fillRef idx="3">
+            <a:schemeClr val="accent1"/>
+          </a:fillRef>
+          <a:effectRef idx="2">
+            <a:schemeClr val="accent1"/>
+          </a:effectRef>
+          <a:fontRef idx="minor">
+            <a:schemeClr val="lt1"/>
+          </a:fontRef>
+        </p:style>
+        <p:txBody>
+          <a:bodyPr rtlCol="0" anchor="ctr"/>
+          <a:lstStyle/>
+          <a:p>
+            <a:pPr algn="ctr"/>
+          </a:p>
+        </p:txBody>
+      </p:sp>
+      <p:sp>
+        <p:nvSpPr>
+          <p:cNvPr id="3" name="TextBox 2"/>
+          <p:cNvSpPr txBox="1"/>
+          <p:nvPr/>
+        </p:nvSpPr>
+        <p:spPr>
+          <a:xfrm>
+            <a:off x="640080" y="0"/>
+            <a:ext cx="9082735" cy="1188720"/>
+          </a:xfrm>
+          <a:prstGeom prst="rect">
+            <a:avLst/>
+          </a:prstGeom>
+          <a:noFill/>
+        </p:spPr>
+        <p:txBody>
+          <a:bodyPr wrap="square" anchor="ctr" lIns="0" rIns="0" tIns="0" bIns="0">
+            <a:spAutoFit/>
+          </a:bodyPr>
+          <a:lstStyle/>
+          <a:p>
+            <a:pPr algn="ctr"/>
+            <a:r>
+              <a:rPr sz="2600" b="1" i="0">
+                <a:solidFill>
+                  <a:srgbClr val="FFFFFF"/>
+                </a:solidFill>
+                <a:latin typeface="Calibri"/>
+              </a:rPr>
+              <a:t>RUTA DE ENTREGABLES DEL CURSO</a:t>
+            </a:r>
+          </a:p>
+        </p:txBody>
+      </p:sp>
+      <p:sp>
+        <p:nvSpPr>
+          <p:cNvPr id="4" name="TextBox 3"/>
+          <p:cNvSpPr txBox="1"/>
+          <p:nvPr/>
+        </p:nvSpPr>
+        <p:spPr>
+          <a:xfrm>
+            <a:off x="640080" y="1280160"/>
+            <a:ext cx="10911535" cy="411480"/>
+          </a:xfrm>
+          <a:prstGeom prst="rect">
+            <a:avLst/>
+          </a:prstGeom>
+          <a:noFill/>
+        </p:spPr>
+        <p:txBody>
+          <a:bodyPr wrap="square" anchor="t" lIns="0" rIns="0" tIns="0" bIns="0">
+            <a:spAutoFit/>
+          </a:bodyPr>
+          <a:lstStyle/>
+          <a:p>
+            <a:pPr algn="ctr"/>
+            <a:r>
+              <a:rPr sz="1500" b="0" i="0">
+                <a:solidFill>
+                  <a:srgbClr val="2B2B2B"/>
+                </a:solidFill>
+                <a:latin typeface="Calibri"/>
+              </a:rPr>
+              <a:t>Sin fechas a propósito: aquí va </a:t>
+            </a:r>
+            <a:r>
+              <a:rPr sz="1500" b="1" i="0">
+                <a:solidFill>
+                  <a:srgbClr val="2B2B2B"/>
+                </a:solidFill>
+                <a:latin typeface="Calibri"/>
+              </a:rPr>
+              <a:t>en qué punto del curso</a:t>
+            </a:r>
+            <a:r>
+              <a:rPr sz="1500" b="0" i="0">
+                <a:solidFill>
+                  <a:srgbClr val="2B2B2B"/>
+                </a:solidFill>
+                <a:latin typeface="Calibri"/>
+              </a:rPr>
+              <a:t> cierra cada ítem · la ventana exacta la fija CDigital</a:t>
+            </a:r>
+          </a:p>
+        </p:txBody>
+      </p:sp>
+      <p:graphicFrame>
+        <p:nvGraphicFramePr>
+          <p:cNvPr id="5" name="Table 4"/>
+          <p:cNvGraphicFramePr>
+            <a:graphicFrameLocks noGrp="1"/>
+          </p:cNvGraphicFramePr>
+          <p:nvPr/>
+        </p:nvGraphicFramePr>
+        <p:xfrm>
+          <a:off x="640080" y="2011679"/>
+          <a:ext cx="10911533" cy="3017520"/>
+        </p:xfrm>
+        <a:graphic>
+          <a:graphicData uri="http://schemas.openxmlformats.org/drawingml/2006/table">
+            <a:tbl>
+              <a:tblPr>
+                <a:tableStyleId>{2D5ABB26-0587-4C30-8999-92F81FD0307C}</a:tableStyleId>
+              </a:tblPr>
+              <a:tblGrid>
+                <a:gridCol w="2659113"/>
+                <a:gridCol w="2659113"/>
+                <a:gridCol w="5593307"/>
+              </a:tblGrid>
+              <a:tr h="502920">
+                <a:tc>
+                  <a:txBody>
+                    <a:bodyPr/>
+                    <a:lstStyle/>
+                    <a:p>
+                      <a:pPr algn="l"/>
+                      <a:r>
+                        <a:rPr sz="1300" b="1" i="0">
+                          <a:solidFill>
+                            <a:srgbClr val="FFFFFF"/>
+                          </a:solidFill>
+                          <a:latin typeface="Calibri"/>
+                        </a:rPr>
+                        <a:t>Cierra en la semana de…</a:t>
+                      </a:r>
+                    </a:p>
+                  </a:txBody>
+                  <a:tcPr anchor="ctr" marL="109728" marR="91440" marT="36576" marB="36576">
+                    <a:solidFill>
+                      <a:srgbClr val="0C2340"/>
+                    </a:solidFill>
+                  </a:tcPr>
+                </a:tc>
+                <a:tc>
+                  <a:txBody>
+                    <a:bodyPr/>
+                    <a:lstStyle/>
+                    <a:p>
+                      <a:pPr algn="l"/>
+                      <a:r>
+                        <a:rPr sz="1300" b="1" i="0">
+                          <a:solidFill>
+                            <a:srgbClr val="FFFFFF"/>
+                          </a:solidFill>
+                          <a:latin typeface="Calibri"/>
+                        </a:rPr>
+                        <a:t>Entregable</a:t>
+                      </a:r>
+                    </a:p>
+                  </a:txBody>
+                  <a:tcPr anchor="ctr" marL="109728" marR="91440" marT="36576" marB="36576">
+                    <a:solidFill>
+                      <a:srgbClr val="0C2340"/>
+                    </a:solidFill>
+                  </a:tcPr>
+                </a:tc>
+                <a:tc>
+                  <a:txBody>
+                    <a:bodyPr/>
+                    <a:lstStyle/>
+                    <a:p>
+                      <a:pPr algn="l"/>
+                      <a:r>
+                        <a:rPr sz="1300" b="1" i="0">
+                          <a:solidFill>
+                            <a:srgbClr val="FFFFFF"/>
+                          </a:solidFill>
+                          <a:latin typeface="Calibri"/>
+                        </a:rPr>
+                        <a:t>Qué debes tener listo</a:t>
+                      </a:r>
+                    </a:p>
+                  </a:txBody>
+                  <a:tcPr anchor="ctr" marL="109728" marR="91440" marT="36576" marB="36576">
+                    <a:solidFill>
+                      <a:srgbClr val="0C2340"/>
+                    </a:solidFill>
+                  </a:tcPr>
+                </a:tc>
+              </a:tr>
+              <a:tr h="502920">
+                <a:tc>
+                  <a:txBody>
+                    <a:bodyPr/>
+                    <a:lstStyle/>
+                    <a:p>
+                      <a:pPr algn="l"/>
+                      <a:r>
+                        <a:rPr sz="1100" b="1" i="0">
+                          <a:solidFill>
+                            <a:srgbClr val="2B2B2B"/>
+                          </a:solidFill>
+                          <a:latin typeface="Calibri"/>
+                        </a:rPr>
+                        <a:t>Sesión 02</a:t>
+                      </a:r>
+                      <a:r>
+                        <a:rPr sz="1100" b="0" i="0">
+                          <a:solidFill>
+                            <a:srgbClr val="2B2B2B"/>
+                          </a:solidFill>
+                          <a:latin typeface="Calibri"/>
+                        </a:rPr>
+                        <a:t> · ya cerró</a:t>
+                      </a:r>
+                    </a:p>
+                  </a:txBody>
+                  <a:tcPr anchor="ctr" marL="109728" marR="91440" marT="36576" marB="36576">
+                    <a:solidFill>
+                      <a:srgbClr val="FFFFFF"/>
+                    </a:solidFill>
+                  </a:tcPr>
+                </a:tc>
+                <a:tc>
+                  <a:txBody>
+                    <a:bodyPr/>
+                    <a:lstStyle/>
+                    <a:p>
+                      <a:pPr algn="l"/>
+                      <a:r>
+                        <a:rPr sz="1100" b="1" i="0">
+                          <a:solidFill>
+                            <a:srgbClr val="2B2B2B"/>
+                          </a:solidFill>
+                          <a:latin typeface="Calibri"/>
+                        </a:rPr>
+                        <a:t>Quiz</a:t>
+                      </a:r>
+                      <a:r>
+                        <a:rPr sz="1100" b="0" i="0">
+                          <a:solidFill>
+                            <a:srgbClr val="2B2B2B"/>
+                          </a:solidFill>
+                          <a:latin typeface="Calibri"/>
+                        </a:rPr>
+                        <a:t> · Cuestionario · 25%</a:t>
+                      </a:r>
+                    </a:p>
+                  </a:txBody>
+                  <a:tcPr anchor="ctr" marL="109728" marR="91440" marT="36576" marB="36576">
+                    <a:solidFill>
+                      <a:srgbClr val="FFFFFF"/>
+                    </a:solidFill>
+                  </a:tcPr>
+                </a:tc>
+                <a:tc>
+                  <a:txBody>
+                    <a:bodyPr/>
+                    <a:lstStyle/>
+                    <a:p>
+                      <a:pPr algn="l"/>
+                      <a:r>
+                        <a:rPr sz="1100" b="0" i="0">
+                          <a:solidFill>
+                            <a:srgbClr val="2B2B2B"/>
+                          </a:solidFill>
+                          <a:latin typeface="Calibri"/>
+                        </a:rPr>
+                        <a:t>Estudia </a:t>
+                      </a:r>
+                      <a:r>
+                        <a:rPr sz="1100" b="1" i="0">
+                          <a:solidFill>
+                            <a:srgbClr val="2B2B2B"/>
+                          </a:solidFill>
+                          <a:latin typeface="Calibri"/>
+                        </a:rPr>
+                        <a:t>problema y pregunta</a:t>
+                      </a:r>
+                      <a:r>
+                        <a:rPr sz="1100" b="0" i="0">
+                          <a:solidFill>
+                            <a:srgbClr val="2B2B2B"/>
+                          </a:solidFill>
+                          <a:latin typeface="Calibri"/>
+                        </a:rPr>
+                        <a:t> de investigación; resuélvelo dentro de su ventana.</a:t>
+                      </a:r>
+                    </a:p>
+                  </a:txBody>
+                  <a:tcPr anchor="ctr" marL="109728" marR="91440" marT="36576" marB="36576">
+                    <a:solidFill>
+                      <a:srgbClr val="FFFFFF"/>
+                    </a:solidFill>
+                  </a:tcPr>
+                </a:tc>
+              </a:tr>
+              <a:tr h="502920">
+                <a:tc>
+                  <a:txBody>
+                    <a:bodyPr/>
+                    <a:lstStyle/>
+                    <a:p>
+                      <a:pPr algn="l"/>
+                      <a:r>
+                        <a:rPr sz="1100" b="1" i="0">
+                          <a:solidFill>
+                            <a:srgbClr val="2B2B2B"/>
+                          </a:solidFill>
+                          <a:latin typeface="Calibri"/>
+                        </a:rPr>
+                        <a:t>Sesión 07</a:t>
+                      </a:r>
+                      <a:r>
+                        <a:rPr sz="1100" b="0" i="0">
+                          <a:solidFill>
+                            <a:srgbClr val="2B2B2B"/>
+                          </a:solidFill>
+                          <a:latin typeface="Calibri"/>
+                        </a:rPr>
+                        <a:t> · pendiente</a:t>
+                      </a:r>
+                    </a:p>
+                  </a:txBody>
+                  <a:tcPr anchor="ctr" marL="109728" marR="91440" marT="36576" marB="36576">
+                    <a:solidFill>
+                      <a:srgbClr val="F2F2F2"/>
+                    </a:solidFill>
+                  </a:tcPr>
+                </a:tc>
+                <a:tc>
+                  <a:txBody>
+                    <a:bodyPr/>
+                    <a:lstStyle/>
+                    <a:p>
+                      <a:pPr algn="l"/>
+                      <a:r>
+                        <a:rPr sz="1100" b="1" i="0">
+                          <a:solidFill>
+                            <a:srgbClr val="2B2B2B"/>
+                          </a:solidFill>
+                          <a:latin typeface="Calibri"/>
+                        </a:rPr>
+                        <a:t>ACA 1</a:t>
+                      </a:r>
+                      <a:r>
+                        <a:rPr sz="1100" b="0" i="0">
+                          <a:solidFill>
+                            <a:srgbClr val="2B2B2B"/>
+                          </a:solidFill>
+                          <a:latin typeface="Calibri"/>
+                        </a:rPr>
+                        <a:t> · Tarea · 25%</a:t>
+                      </a:r>
+                    </a:p>
+                  </a:txBody>
+                  <a:tcPr anchor="ctr" marL="109728" marR="91440" marT="36576" marB="36576">
+                    <a:solidFill>
+                      <a:srgbClr val="F2F2F2"/>
+                    </a:solidFill>
+                  </a:tcPr>
+                </a:tc>
+                <a:tc>
+                  <a:txBody>
+                    <a:bodyPr/>
+                    <a:lstStyle/>
+                    <a:p>
+                      <a:pPr algn="l"/>
+                      <a:r>
+                        <a:rPr sz="1100" b="0" i="0">
+                          <a:solidFill>
+                            <a:srgbClr val="2B2B2B"/>
+                          </a:solidFill>
+                          <a:latin typeface="Calibri"/>
+                        </a:rPr>
+                        <a:t>Sube en </a:t>
+                      </a:r>
+                      <a:r>
+                        <a:rPr sz="1100" b="1" i="0">
+                          <a:solidFill>
+                            <a:srgbClr val="2B2B2B"/>
+                          </a:solidFill>
+                          <a:latin typeface="Calibri"/>
+                        </a:rPr>
+                        <a:t>plantilla APA</a:t>
+                      </a:r>
+                      <a:r>
+                        <a:rPr sz="1100" b="0" i="0">
+                          <a:solidFill>
+                            <a:srgbClr val="2B2B2B"/>
+                          </a:solidFill>
+                          <a:latin typeface="Calibri"/>
+                        </a:rPr>
+                        <a:t> problema, pregunta, objetivos, mínimo 6 antecedentes y los marcos.</a:t>
+                      </a:r>
+                    </a:p>
+                  </a:txBody>
+                  <a:tcPr anchor="ctr" marL="109728" marR="91440" marT="36576" marB="36576">
+                    <a:solidFill>
+                      <a:srgbClr val="F2F2F2"/>
+                    </a:solidFill>
+                  </a:tcPr>
+                </a:tc>
+              </a:tr>
+              <a:tr h="502920">
+                <a:tc>
+                  <a:txBody>
+                    <a:bodyPr/>
+                    <a:lstStyle/>
+                    <a:p>
+                      <a:pPr algn="l"/>
+                      <a:r>
+                        <a:rPr sz="1100" b="1" i="0">
+                          <a:solidFill>
+                            <a:srgbClr val="2B2B2B"/>
+                          </a:solidFill>
+                          <a:latin typeface="Calibri"/>
+                        </a:rPr>
+                        <a:t>Sesión 10</a:t>
+                      </a:r>
+                      <a:r>
+                        <a:rPr sz="1100" b="0" i="0">
+                          <a:solidFill>
+                            <a:srgbClr val="2B2B2B"/>
+                          </a:solidFill>
+                          <a:latin typeface="Calibri"/>
+                        </a:rPr>
+                        <a:t> · pendiente</a:t>
+                      </a:r>
+                    </a:p>
+                  </a:txBody>
+                  <a:tcPr anchor="ctr" marL="109728" marR="91440" marT="36576" marB="36576">
+                    <a:solidFill>
+                      <a:srgbClr val="FFFFFF"/>
+                    </a:solidFill>
+                  </a:tcPr>
+                </a:tc>
+                <a:tc>
+                  <a:txBody>
+                    <a:bodyPr/>
+                    <a:lstStyle/>
+                    <a:p>
+                      <a:pPr algn="l"/>
+                      <a:r>
+                        <a:rPr sz="1100" b="1" i="0">
+                          <a:solidFill>
+                            <a:srgbClr val="2B2B2B"/>
+                          </a:solidFill>
+                          <a:latin typeface="Calibri"/>
+                        </a:rPr>
+                        <a:t>ACA FINAL</a:t>
+                      </a:r>
+                      <a:r>
+                        <a:rPr sz="1100" b="0" i="0">
+                          <a:solidFill>
+                            <a:srgbClr val="2B2B2B"/>
+                          </a:solidFill>
+                          <a:latin typeface="Calibri"/>
+                        </a:rPr>
+                        <a:t> · Tarea · 42%</a:t>
+                      </a:r>
+                    </a:p>
+                  </a:txBody>
+                  <a:tcPr anchor="ctr" marL="109728" marR="91440" marT="36576" marB="36576">
+                    <a:solidFill>
+                      <a:srgbClr val="FFFFFF"/>
+                    </a:solidFill>
+                  </a:tcPr>
+                </a:tc>
+                <a:tc>
+                  <a:txBody>
+                    <a:bodyPr/>
+                    <a:lstStyle/>
+                    <a:p>
+                      <a:pPr algn="l"/>
+                      <a:r>
+                        <a:rPr sz="1100" b="0" i="0">
+                          <a:solidFill>
+                            <a:srgbClr val="2B2B2B"/>
+                          </a:solidFill>
+                          <a:latin typeface="Calibri"/>
+                        </a:rPr>
+                        <a:t>Sube el anteproyecto integrado con las </a:t>
+                      </a:r>
+                      <a:r>
+                        <a:rPr sz="1100" b="1" i="0">
+                          <a:solidFill>
+                            <a:srgbClr val="2B2B2B"/>
+                          </a:solidFill>
+                          <a:latin typeface="Calibri"/>
+                        </a:rPr>
+                        <a:t>correcciones</a:t>
+                      </a:r>
+                      <a:r>
+                        <a:rPr sz="1100" b="0" i="0">
+                          <a:solidFill>
+                            <a:srgbClr val="2B2B2B"/>
+                          </a:solidFill>
+                          <a:latin typeface="Calibri"/>
+                        </a:rPr>
+                        <a:t> de la ACA 1, metodología y viabilidad.</a:t>
+                      </a:r>
+                    </a:p>
+                  </a:txBody>
+                  <a:tcPr anchor="ctr" marL="109728" marR="91440" marT="36576" marB="36576">
+                    <a:solidFill>
+                      <a:srgbClr val="FFFFFF"/>
+                    </a:solidFill>
+                  </a:tcPr>
+                </a:tc>
+              </a:tr>
+              <a:tr h="502920">
+                <a:tc>
+                  <a:txBody>
+                    <a:bodyPr/>
+                    <a:lstStyle/>
+                    <a:p>
+                      <a:pPr algn="l"/>
+                      <a:r>
+                        <a:rPr sz="1100" b="1" i="0">
+                          <a:solidFill>
+                            <a:srgbClr val="2B2B2B"/>
+                          </a:solidFill>
+                          <a:latin typeface="Calibri"/>
+                        </a:rPr>
+                        <a:t>Sesión 11</a:t>
+                      </a:r>
+                      <a:r>
+                        <a:rPr sz="1100" b="0" i="0">
+                          <a:solidFill>
+                            <a:srgbClr val="2B2B2B"/>
+                          </a:solidFill>
+                          <a:latin typeface="Calibri"/>
+                        </a:rPr>
+                        <a:t> · pendiente</a:t>
+                      </a:r>
+                    </a:p>
+                  </a:txBody>
+                  <a:tcPr anchor="ctr" marL="109728" marR="91440" marT="36576" marB="36576">
+                    <a:solidFill>
+                      <a:srgbClr val="F2F2F2"/>
+                    </a:solidFill>
+                  </a:tcPr>
+                </a:tc>
+                <a:tc>
+                  <a:txBody>
+                    <a:bodyPr/>
+                    <a:lstStyle/>
+                    <a:p>
+                      <a:pPr algn="l"/>
+                      <a:r>
+                        <a:rPr sz="1100" b="1" i="0">
+                          <a:solidFill>
+                            <a:srgbClr val="2B2B2B"/>
+                          </a:solidFill>
+                          <a:latin typeface="Calibri"/>
+                        </a:rPr>
+                        <a:t>Autoevaluación</a:t>
+                      </a:r>
+                      <a:r>
+                        <a:rPr sz="1100" b="0" i="0">
+                          <a:solidFill>
+                            <a:srgbClr val="2B2B2B"/>
+                          </a:solidFill>
+                          <a:latin typeface="Calibri"/>
+                        </a:rPr>
+                        <a:t> · Cuestionario · 4%</a:t>
+                      </a:r>
+                    </a:p>
+                  </a:txBody>
+                  <a:tcPr anchor="ctr" marL="109728" marR="91440" marT="36576" marB="36576">
+                    <a:solidFill>
+                      <a:srgbClr val="F2F2F2"/>
+                    </a:solidFill>
+                  </a:tcPr>
+                </a:tc>
+                <a:tc>
+                  <a:txBody>
+                    <a:bodyPr/>
+                    <a:lstStyle/>
+                    <a:p>
+                      <a:pPr algn="l"/>
+                      <a:r>
+                        <a:rPr sz="1100" b="0" i="0">
+                          <a:solidFill>
+                            <a:srgbClr val="2B2B2B"/>
+                          </a:solidFill>
+                          <a:latin typeface="Calibri"/>
+                        </a:rPr>
+                        <a:t>Diligénciala tú, dentro de su ventana, según tu </a:t>
+                      </a:r>
+                      <a:r>
+                        <a:rPr sz="1100" b="1" i="0">
+                          <a:solidFill>
+                            <a:srgbClr val="2B2B2B"/>
+                          </a:solidFill>
+                          <a:latin typeface="Calibri"/>
+                        </a:rPr>
+                        <a:t>participación real</a:t>
+                      </a:r>
+                      <a:r>
+                        <a:rPr sz="1100" b="0" i="0">
+                          <a:solidFill>
+                            <a:srgbClr val="2B2B2B"/>
+                          </a:solidFill>
+                          <a:latin typeface="Calibri"/>
+                        </a:rPr>
+                        <a:t>.</a:t>
+                      </a:r>
+                    </a:p>
+                  </a:txBody>
+                  <a:tcPr anchor="ctr" marL="109728" marR="91440" marT="36576" marB="36576">
+                    <a:solidFill>
+                      <a:srgbClr val="F2F2F2"/>
+                    </a:solidFill>
+                  </a:tcPr>
+                </a:tc>
+              </a:tr>
+              <a:tr h="502920">
+                <a:tc>
+                  <a:txBody>
+                    <a:bodyPr/>
+                    <a:lstStyle/>
+                    <a:p>
+                      <a:pPr algn="l"/>
+                      <a:r>
+                        <a:rPr sz="1100" b="1" i="0">
+                          <a:solidFill>
+                            <a:srgbClr val="2B2B2B"/>
+                          </a:solidFill>
+                          <a:latin typeface="Calibri"/>
+                        </a:rPr>
+                        <a:t>Sesión 11</a:t>
+                      </a:r>
+                      <a:r>
+                        <a:rPr sz="1100" b="0" i="0">
+                          <a:solidFill>
+                            <a:srgbClr val="2B2B2B"/>
+                          </a:solidFill>
+                          <a:latin typeface="Calibri"/>
+                        </a:rPr>
+                        <a:t> · pendiente</a:t>
+                      </a:r>
+                    </a:p>
+                  </a:txBody>
+                  <a:tcPr anchor="ctr" marL="109728" marR="91440" marT="36576" marB="36576">
+                    <a:solidFill>
+                      <a:srgbClr val="FFFFFF"/>
+                    </a:solidFill>
+                  </a:tcPr>
+                </a:tc>
+                <a:tc>
+                  <a:txBody>
+                    <a:bodyPr/>
+                    <a:lstStyle/>
+                    <a:p>
+                      <a:pPr algn="l"/>
+                      <a:r>
+                        <a:rPr sz="1100" b="1" i="0">
+                          <a:solidFill>
+                            <a:srgbClr val="2B2B2B"/>
+                          </a:solidFill>
+                          <a:latin typeface="Calibri"/>
+                        </a:rPr>
+                        <a:t>Coevaluación</a:t>
+                      </a:r>
+                      <a:r>
+                        <a:rPr sz="1100" b="0" i="0">
+                          <a:solidFill>
+                            <a:srgbClr val="2B2B2B"/>
+                          </a:solidFill>
+                          <a:latin typeface="Calibri"/>
+                        </a:rPr>
+                        <a:t> · Foro · 4%</a:t>
+                      </a:r>
+                    </a:p>
+                  </a:txBody>
+                  <a:tcPr anchor="ctr" marL="109728" marR="91440" marT="36576" marB="36576">
+                    <a:solidFill>
+                      <a:srgbClr val="FFFFFF"/>
+                    </a:solidFill>
+                  </a:tcPr>
+                </a:tc>
+                <a:tc>
+                  <a:txBody>
+                    <a:bodyPr/>
+                    <a:lstStyle/>
+                    <a:p>
+                      <a:pPr algn="l"/>
+                      <a:r>
+                        <a:rPr sz="1100" b="1" i="0">
+                          <a:solidFill>
+                            <a:srgbClr val="2B2B2B"/>
+                          </a:solidFill>
+                          <a:latin typeface="Calibri"/>
+                        </a:rPr>
+                        <a:t>Publica</a:t>
+                      </a:r>
+                      <a:r>
+                        <a:rPr sz="1100" b="0" i="0">
+                          <a:solidFill>
+                            <a:srgbClr val="2B2B2B"/>
+                          </a:solidFill>
+                          <a:latin typeface="Calibri"/>
+                        </a:rPr>
+                        <a:t> tu propio aporte y valora hechos del trabajo del equipo, con respeto.</a:t>
+                      </a:r>
+                    </a:p>
+                  </a:txBody>
+                  <a:tcPr anchor="ctr" marL="109728" marR="91440" marT="36576" marB="36576">
+                    <a:solidFill>
+                      <a:srgbClr val="FFFFFF"/>
+                    </a:solidFill>
+                  </a:tcPr>
+                </a:tc>
+              </a:tr>
+            </a:tbl>
+          </a:graphicData>
+        </a:graphic>
+      </p:graphicFrame>
+      <p:sp>
+        <p:nvSpPr>
+          <p:cNvPr id="6" name="TextBox 5"/>
+          <p:cNvSpPr txBox="1"/>
+          <p:nvPr/>
+        </p:nvSpPr>
+        <p:spPr>
+          <a:xfrm>
+            <a:off x="640080" y="5166360"/>
+            <a:ext cx="10911535" cy="548640"/>
+          </a:xfrm>
+          <a:prstGeom prst="rect">
+            <a:avLst/>
+          </a:prstGeom>
+          <a:noFill/>
+        </p:spPr>
+        <p:txBody>
+          <a:bodyPr wrap="square" anchor="t" lIns="0" rIns="0" tIns="0" bIns="0">
+            <a:spAutoFit/>
+          </a:bodyPr>
+          <a:lstStyle/>
+          <a:p>
+            <a:r>
+              <a:rPr sz="1200" b="0" i="1">
+                <a:solidFill>
+                  <a:srgbClr val="2B2B2B"/>
+                </a:solidFill>
+                <a:latin typeface="Calibri"/>
+              </a:rPr>
+              <a:t>Esta misma tabla va al final de todas las sesiones. La </a:t>
+            </a:r>
+            <a:r>
+              <a:rPr sz="1200" b="1" i="1">
+                <a:solidFill>
+                  <a:srgbClr val="2B2B2B"/>
+                </a:solidFill>
+                <a:latin typeface="Calibri"/>
+              </a:rPr>
+              <a:t>fecha</a:t>
+            </a:r>
+            <a:r>
+              <a:rPr sz="1200" b="0" i="1">
+                <a:solidFill>
+                  <a:srgbClr val="2B2B2B"/>
+                </a:solidFill>
+                <a:latin typeface="Calibri"/>
+              </a:rPr>
+              <a:t> de cada ventana está en el enunciado del ítem (`Clases/Recursos/ACAs/`) y en el aula: si el aula y cualquier otro material se contradicen, </a:t>
+            </a:r>
+            <a:r>
+              <a:rPr sz="1200" b="1" i="1">
+                <a:solidFill>
+                  <a:srgbClr val="2B2B2B"/>
+                </a:solidFill>
+                <a:latin typeface="Calibri"/>
+              </a:rPr>
+              <a:t>manda el aula</a:t>
+            </a:r>
+            <a:r>
+              <a:rPr sz="1200" b="0" i="1">
+                <a:solidFill>
+                  <a:srgbClr val="2B2B2B"/>
+                </a:solidFill>
+                <a:latin typeface="Calibri"/>
+              </a:rPr>
+              <a:t>.</a:t>
+            </a:r>
+          </a:p>
+        </p:txBody>
+      </p:sp>
+      <p:sp>
+        <p:nvSpPr>
+          <p:cNvPr id="7" name="TextBox 6"/>
+          <p:cNvSpPr txBox="1"/>
+          <p:nvPr/>
+        </p:nvSpPr>
+        <p:spPr>
+          <a:xfrm>
+            <a:off x="11094415" y="6446520"/>
+            <a:ext cx="548640" cy="274320"/>
+          </a:xfrm>
+          <a:prstGeom prst="rect">
+            <a:avLst/>
+          </a:prstGeom>
+          <a:noFill/>
+        </p:spPr>
+        <p:txBody>
+          <a:bodyPr wrap="square" anchor="t" lIns="0" rIns="0" tIns="0" bIns="0">
+            <a:spAutoFit/>
+          </a:bodyPr>
+          <a:lstStyle/>
+          <a:p>
+            <a:pPr algn="r"/>
+            <a:r>
+              <a:rPr sz="1000" b="1" i="0">
+                <a:solidFill>
+                  <a:srgbClr val="8F989D"/>
+                </a:solidFill>
+                <a:latin typeface="Calibri"/>
+              </a:rPr>
+              <a:t>19</a:t>
+            </a:r>
+          </a:p>
+        </p:txBody>
+      </p:sp>
+    </p:spTree>
+  </p:cSld>
+  <p:clrMapOvr>
+    <a:masterClrMapping/>
+  </p:clrMapOvr>
+</p:sld>
+</file>
+
+<file path=ppt/slides/slide2.xml><?xml version="1.0" encoding="utf-8"?>
+<p:sld xmlns:a="http://schemas.openxmlformats.org/drawingml/2006/main" xmlns:p="http://schemas.openxmlformats.org/presentationml/2006/main" xmlns:r="http://schemas.openxmlformats.org/officeDocument/2006/relationships">
+  <p:cSld>
+    <p:bg>
+      <p:bgPr>
+        <a:solidFill>
+          <a:srgbClr val="FFFFFF"/>
+        </a:solidFill>
+        <a:effectLst/>
+      </p:bgPr>
+    </p:bg>
+    <p:spTree>
+      <p:nvGrpSpPr>
+        <p:cNvPr id="1" name=""/>
+        <p:cNvGrpSpPr/>
+        <p:nvPr/>
+      </p:nvGrpSpPr>
+      <p:grpSpPr/>
+      <p:sp>
+        <p:nvSpPr>
+          <p:cNvPr id="2" name="Rectangle 1"/>
+          <p:cNvSpPr/>
+          <p:nvPr/>
+        </p:nvSpPr>
+        <p:spPr>
+          <a:xfrm>
+            <a:off x="0" y="0"/>
+            <a:ext cx="12191695" cy="1188720"/>
+          </a:xfrm>
+          <a:prstGeom prst="rect">
+            <a:avLst/>
+          </a:prstGeom>
+          <a:solidFill>
+            <a:srgbClr val="0C2340"/>
+          </a:solidFill>
+          <a:ln>
+            <a:noFill/>
+          </a:ln>
+          <a:effectLst/>
+        </p:spPr>
+        <p:style>
+          <a:lnRef idx="1">
+            <a:schemeClr val="accent1"/>
+          </a:lnRef>
+          <a:fillRef idx="3">
+            <a:schemeClr val="accent1"/>
+          </a:fillRef>
+          <a:effectRef idx="2">
+            <a:schemeClr val="accent1"/>
+          </a:effectRef>
+          <a:fontRef idx="minor">
+            <a:schemeClr val="lt1"/>
+          </a:fontRef>
+        </p:style>
+        <p:txBody>
+          <a:bodyPr rtlCol="0" anchor="ctr"/>
+          <a:lstStyle/>
+          <a:p>
+            <a:pPr algn="ctr"/>
+          </a:p>
+        </p:txBody>
+      </p:sp>
+      <p:sp>
+        <p:nvSpPr>
+          <p:cNvPr id="3" name="TextBox 2"/>
+          <p:cNvSpPr txBox="1"/>
+          <p:nvPr/>
+        </p:nvSpPr>
+        <p:spPr>
+          <a:xfrm>
+            <a:off x="640080" y="0"/>
+            <a:ext cx="9082735" cy="1188720"/>
+          </a:xfrm>
+          <a:prstGeom prst="rect">
+            <a:avLst/>
+          </a:prstGeom>
+          <a:noFill/>
+        </p:spPr>
+        <p:txBody>
+          <a:bodyPr wrap="square" anchor="ctr" lIns="0" rIns="0" tIns="0" bIns="0">
+            <a:spAutoFit/>
+          </a:bodyPr>
+          <a:lstStyle/>
+          <a:p>
+            <a:pPr algn="ctr"/>
+            <a:r>
+              <a:rPr sz="2600" b="1" i="0">
+                <a:solidFill>
+                  <a:srgbClr val="FFFFFF"/>
+                </a:solidFill>
+                <a:latin typeface="Calibri"/>
+              </a:rPr>
+              <a:t>Por qué nadie investiga desde cero</a:t>
+            </a:r>
+          </a:p>
+        </p:txBody>
+      </p:sp>
+      <p:sp>
+        <p:nvSpPr>
+          <p:cNvPr id="4" name="TextBox 3"/>
+          <p:cNvSpPr txBox="1"/>
+          <p:nvPr/>
+        </p:nvSpPr>
+        <p:spPr>
+          <a:xfrm>
+            <a:off x="640080" y="1691639"/>
+            <a:ext cx="10911535" cy="4617720"/>
+          </a:xfrm>
+          <a:prstGeom prst="rect">
+            <a:avLst/>
+          </a:prstGeom>
+          <a:noFill/>
+        </p:spPr>
+        <p:txBody>
+          <a:bodyPr wrap="square" anchor="t" lIns="0" rIns="0" tIns="0" bIns="0">
+            <a:spAutoFit/>
+          </a:bodyPr>
+          <a:lstStyle/>
+          <a:p>
+            <a:pPr>
+              <a:spcAft>
+                <a:spcPts val="1000"/>
+              </a:spcAft>
+            </a:pPr>
+            <a:r>
+              <a:rPr sz="1600" b="0" i="0">
+                <a:solidFill>
+                  <a:srgbClr val="2B2B2B"/>
+                </a:solidFill>
+                <a:latin typeface="Calibri"/>
+              </a:rPr>
+              <a:t>–   Antes de proponer algo hay que saber </a:t>
+            </a:r>
+            <a:r>
+              <a:rPr sz="1600" b="1" i="0">
+                <a:solidFill>
+                  <a:srgbClr val="2B2B2B"/>
+                </a:solidFill>
+                <a:latin typeface="Calibri"/>
+              </a:rPr>
+              <a:t>qué ya se intentó</a:t>
+            </a:r>
+            <a:r>
+              <a:rPr sz="1600" b="0" i="0">
+                <a:solidFill>
+                  <a:srgbClr val="2B2B2B"/>
+                </a:solidFill>
+                <a:latin typeface="Calibri"/>
+              </a:rPr>
+              <a:t> y con qué resultado.</a:t>
+            </a:r>
+          </a:p>
+          <a:p>
+            <a:pPr lvl="1">
+              <a:spcAft>
+                <a:spcPts val="600"/>
+              </a:spcAft>
+            </a:pPr>
+            <a:r>
+              <a:rPr sz="1500" b="0" i="0">
+                <a:solidFill>
+                  <a:srgbClr val="2B2B2B"/>
+                </a:solidFill>
+                <a:latin typeface="Calibri"/>
+              </a:rPr>
+              <a:t>●   Sin esa revisión, un anteproyecto corre el riesgo de reinventar lo que ya está resuelto.</a:t>
+            </a:r>
+          </a:p>
+          <a:p>
+            <a:pPr>
+              <a:spcAft>
+                <a:spcPts val="1000"/>
+              </a:spcAft>
+            </a:pPr>
+            <a:r>
+              <a:rPr sz="1600" b="0" i="0">
+                <a:solidFill>
+                  <a:srgbClr val="2B2B2B"/>
+                </a:solidFill>
+                <a:latin typeface="Calibri"/>
+              </a:rPr>
+              <a:t>–   Caso de aula: un equipo propone un asistente de IA para clasificar tickets de soporte.</a:t>
+            </a:r>
+          </a:p>
+          <a:p>
+            <a:pPr lvl="1">
+              <a:spcAft>
+                <a:spcPts val="600"/>
+              </a:spcAft>
+            </a:pPr>
+            <a:r>
+              <a:rPr sz="1500" b="0" i="0">
+                <a:solidFill>
+                  <a:srgbClr val="2B2B2B"/>
+                </a:solidFill>
+                <a:latin typeface="Calibri"/>
+              </a:rPr>
+              <a:t>●   Al buscar en Scholar aparecen cinco estudios recientes sobre eso… y dos dicen exactamente dónde falla.</a:t>
+            </a:r>
+          </a:p>
+          <a:p>
+            <a:pPr lvl="1">
+              <a:spcAft>
+                <a:spcPts val="600"/>
+              </a:spcAft>
+            </a:pPr>
+            <a:r>
+              <a:rPr sz="1500" b="0" i="0">
+                <a:solidFill>
+                  <a:srgbClr val="2B2B2B"/>
+                </a:solidFill>
+                <a:latin typeface="Calibri"/>
+              </a:rPr>
+              <a:t>●   Ese hallazgo no arruina el proyecto: </a:t>
+            </a:r>
+            <a:r>
+              <a:rPr sz="1500" b="1" i="0">
+                <a:solidFill>
+                  <a:srgbClr val="2B2B2B"/>
+                </a:solidFill>
+                <a:latin typeface="Calibri"/>
+              </a:rPr>
+              <a:t>lo salva</a:t>
+            </a:r>
+            <a:r>
+              <a:rPr sz="1500" b="0" i="0">
+                <a:solidFill>
+                  <a:srgbClr val="2B2B2B"/>
+                </a:solidFill>
+                <a:latin typeface="Calibri"/>
+              </a:rPr>
+              <a:t>, porque le da un ángulo propio y defendible.</a:t>
+            </a:r>
+          </a:p>
+          <a:p>
+            <a:pPr>
+              <a:spcAft>
+                <a:spcPts val="1000"/>
+              </a:spcAft>
+            </a:pPr>
+            <a:r>
+              <a:rPr sz="1600" b="0" i="0">
+                <a:solidFill>
+                  <a:srgbClr val="2B2B2B"/>
+                </a:solidFill>
+                <a:latin typeface="Calibri"/>
+              </a:rPr>
+              <a:t>–   Los </a:t>
+            </a:r>
+            <a:r>
+              <a:rPr sz="1600" b="1" i="0">
+                <a:solidFill>
+                  <a:srgbClr val="2B2B2B"/>
+                </a:solidFill>
+                <a:latin typeface="Calibri"/>
+              </a:rPr>
+              <a:t>antecedentes</a:t>
+            </a:r>
+            <a:r>
+              <a:rPr sz="1600" b="0" i="0">
+                <a:solidFill>
+                  <a:srgbClr val="2B2B2B"/>
+                </a:solidFill>
+                <a:latin typeface="Calibri"/>
+              </a:rPr>
+              <a:t> son ese mapa de lo ya investigado. Hoy empezamos a construirlo.</a:t>
+            </a:r>
+          </a:p>
+          <a:p>
+            <a:pPr>
+              <a:spcAft>
+                <a:spcPts val="1000"/>
+              </a:spcAft>
+            </a:pPr>
+            <a:r>
+              <a:rPr sz="1600" b="0" i="0">
+                <a:solidFill>
+                  <a:srgbClr val="2B2B2B"/>
+                </a:solidFill>
+                <a:latin typeface="Calibri"/>
+              </a:rPr>
+              <a:t>–   Antes, veinte minutos sobre la retroalimentación de la primera entrega: los comentarios son instrucciones, no una nota disfrazada.</a:t>
+            </a:r>
+          </a:p>
+        </p:txBody>
+      </p:sp>
+      <p:sp>
+        <p:nvSpPr>
+          <p:cNvPr id="5" name="TextBox 4"/>
+          <p:cNvSpPr txBox="1"/>
+          <p:nvPr/>
+        </p:nvSpPr>
+        <p:spPr>
+          <a:xfrm>
+            <a:off x="11094415" y="6446520"/>
+            <a:ext cx="548640" cy="274320"/>
+          </a:xfrm>
+          <a:prstGeom prst="rect">
+            <a:avLst/>
+          </a:prstGeom>
+          <a:noFill/>
+        </p:spPr>
+        <p:txBody>
+          <a:bodyPr wrap="square" anchor="t" lIns="0" rIns="0" tIns="0" bIns="0">
+            <a:spAutoFit/>
+          </a:bodyPr>
+          <a:lstStyle/>
+          <a:p>
+            <a:pPr algn="r"/>
+            <a:r>
+              <a:rPr sz="1000" b="1" i="0">
+                <a:solidFill>
+                  <a:srgbClr val="8F989D"/>
+                </a:solidFill>
+                <a:latin typeface="Calibri"/>
+              </a:rPr>
+              <a:t>2</a:t>
+            </a:r>
+          </a:p>
+        </p:txBody>
+      </p:sp>
+      <p:sp>
+        <p:nvSpPr>
+          <p:cNvPr id="6" name="TextBox 5"/>
+          <p:cNvSpPr txBox="1"/>
+          <p:nvPr/>
+        </p:nvSpPr>
+        <p:spPr>
+          <a:xfrm>
+            <a:off x="640080" y="5943600"/>
+            <a:ext cx="9997135" cy="457200"/>
+          </a:xfrm>
+          <a:prstGeom prst="rect">
+            <a:avLst/>
+          </a:prstGeom>
+          <a:noFill/>
+        </p:spPr>
+        <p:txBody>
+          <a:bodyPr wrap="square" anchor="t" lIns="0" rIns="0" tIns="0" bIns="0">
+            <a:spAutoFit/>
+          </a:bodyPr>
+          <a:lstStyle/>
+          <a:p>
+            <a:r>
+              <a:rPr sz="1200" b="0" i="1">
+                <a:solidFill>
+                  <a:srgbClr val="2B2B2B"/>
+                </a:solidFill>
+                <a:latin typeface="Calibri"/>
+              </a:rPr>
+              <a:t>Meta orientativa del programa: </a:t>
+            </a:r>
+            <a:r>
+              <a:rPr sz="1200" b="1" i="1">
+                <a:solidFill>
+                  <a:srgbClr val="2B2B2B"/>
+                </a:solidFill>
+                <a:latin typeface="Calibri"/>
+              </a:rPr>
+              <a:t>mínimo 6 antecedentes</a:t>
+            </a:r>
+            <a:r>
+              <a:rPr sz="1200" b="0" i="1">
+                <a:solidFill>
+                  <a:srgbClr val="2B2B2B"/>
+                </a:solidFill>
+                <a:latin typeface="Calibri"/>
+              </a:rPr>
+              <a:t>, mezclando estudios nacionales e internacionales.</a:t>
+            </a:r>
+          </a:p>
+        </p:txBody>
+      </p:sp>
+    </p:spTree>
+  </p:cSld>
+  <p:clrMapOvr>
+    <a:masterClrMapping/>
+  </p:clrMapOvr>
+</p:sld>
+</file>
+
+<file path=ppt/slides/slide20.xml><?xml version="1.0" encoding="utf-8"?>
 <p:sld xmlns:a="http://schemas.openxmlformats.org/drawingml/2006/main" xmlns:p="http://schemas.openxmlformats.org/presentationml/2006/main" xmlns:r="http://schemas.openxmlformats.org/officeDocument/2006/relationships">
   <p:cSld>
     <p:bg>
@@ -7797,387 +9580,6 @@
                 <a:latin typeface="Calibri"/>
               </a:rPr>
               <a:t>PROYECTO I</a:t>
-            </a:r>
-          </a:p>
-        </p:txBody>
-      </p:sp>
-    </p:spTree>
-  </p:cSld>
-  <p:clrMapOvr>
-    <a:masterClrMapping/>
-  </p:clrMapOvr>
-</p:sld>
-</file>
-
-<file path=ppt/slides/slide2.xml><?xml version="1.0" encoding="utf-8"?>
-<p:sld xmlns:a="http://schemas.openxmlformats.org/drawingml/2006/main" xmlns:p="http://schemas.openxmlformats.org/presentationml/2006/main" xmlns:r="http://schemas.openxmlformats.org/officeDocument/2006/relationships">
-  <p:cSld>
-    <p:bg>
-      <p:bgPr>
-        <a:solidFill>
-          <a:srgbClr val="FFFFFF"/>
-        </a:solidFill>
-        <a:effectLst/>
-      </p:bgPr>
-    </p:bg>
-    <p:spTree>
-      <p:nvGrpSpPr>
-        <p:cNvPr id="1" name=""/>
-        <p:cNvGrpSpPr/>
-        <p:nvPr/>
-      </p:nvGrpSpPr>
-      <p:grpSpPr/>
-      <p:sp>
-        <p:nvSpPr>
-          <p:cNvPr id="2" name="Rectangle 1"/>
-          <p:cNvSpPr/>
-          <p:nvPr/>
-        </p:nvSpPr>
-        <p:spPr>
-          <a:xfrm>
-            <a:off x="0" y="0"/>
-            <a:ext cx="12191695" cy="1188720"/>
-          </a:xfrm>
-          <a:prstGeom prst="rect">
-            <a:avLst/>
-          </a:prstGeom>
-          <a:solidFill>
-            <a:srgbClr val="0C2340"/>
-          </a:solidFill>
-          <a:ln>
-            <a:noFill/>
-          </a:ln>
-          <a:effectLst/>
-        </p:spPr>
-        <p:style>
-          <a:lnRef idx="1">
-            <a:schemeClr val="accent1"/>
-          </a:lnRef>
-          <a:fillRef idx="3">
-            <a:schemeClr val="accent1"/>
-          </a:fillRef>
-          <a:effectRef idx="2">
-            <a:schemeClr val="accent1"/>
-          </a:effectRef>
-          <a:fontRef idx="minor">
-            <a:schemeClr val="lt1"/>
-          </a:fontRef>
-        </p:style>
-        <p:txBody>
-          <a:bodyPr rtlCol="0" anchor="ctr"/>
-          <a:lstStyle/>
-          <a:p>
-            <a:pPr algn="ctr"/>
-          </a:p>
-        </p:txBody>
-      </p:sp>
-      <p:sp>
-        <p:nvSpPr>
-          <p:cNvPr id="3" name="TextBox 2"/>
-          <p:cNvSpPr txBox="1"/>
-          <p:nvPr/>
-        </p:nvSpPr>
-        <p:spPr>
-          <a:xfrm>
-            <a:off x="640080" y="0"/>
-            <a:ext cx="9082735" cy="1188720"/>
-          </a:xfrm>
-          <a:prstGeom prst="rect">
-            <a:avLst/>
-          </a:prstGeom>
-          <a:noFill/>
-        </p:spPr>
-        <p:txBody>
-          <a:bodyPr wrap="square" anchor="ctr" lIns="0" rIns="0" tIns="0" bIns="0">
-            <a:spAutoFit/>
-          </a:bodyPr>
-          <a:lstStyle/>
-          <a:p>
-            <a:pPr algn="ctr"/>
-            <a:r>
-              <a:rPr sz="2600" b="1" i="0">
-                <a:solidFill>
-                  <a:srgbClr val="FFFFFF"/>
-                </a:solidFill>
-                <a:latin typeface="Calibri"/>
-              </a:rPr>
-              <a:t>Por qué nadie investiga desde cero</a:t>
-            </a:r>
-          </a:p>
-        </p:txBody>
-      </p:sp>
-      <p:sp>
-        <p:nvSpPr>
-          <p:cNvPr id="4" name="TextBox 3"/>
-          <p:cNvSpPr txBox="1"/>
-          <p:nvPr/>
-        </p:nvSpPr>
-        <p:spPr>
-          <a:xfrm>
-            <a:off x="640080" y="1691639"/>
-            <a:ext cx="10911535" cy="4617720"/>
-          </a:xfrm>
-          <a:prstGeom prst="rect">
-            <a:avLst/>
-          </a:prstGeom>
-          <a:noFill/>
-        </p:spPr>
-        <p:txBody>
-          <a:bodyPr wrap="square" anchor="t" lIns="0" rIns="0" tIns="0" bIns="0">
-            <a:spAutoFit/>
-          </a:bodyPr>
-          <a:lstStyle/>
-          <a:p>
-            <a:pPr>
-              <a:spcAft>
-                <a:spcPts val="1000"/>
-              </a:spcAft>
-            </a:pPr>
-            <a:r>
-              <a:rPr sz="1600" b="0" i="0">
-                <a:solidFill>
-                  <a:srgbClr val="2B2B2B"/>
-                </a:solidFill>
-                <a:latin typeface="Calibri"/>
-              </a:rPr>
-              <a:t>–   Antes de proponer algo hay que saber </a:t>
-            </a:r>
-            <a:r>
-              <a:rPr sz="1600" b="1" i="0">
-                <a:solidFill>
-                  <a:srgbClr val="2B2B2B"/>
-                </a:solidFill>
-                <a:latin typeface="Calibri"/>
-              </a:rPr>
-              <a:t>qué ya se intentó</a:t>
-            </a:r>
-            <a:r>
-              <a:rPr sz="1600" b="0" i="0">
-                <a:solidFill>
-                  <a:srgbClr val="2B2B2B"/>
-                </a:solidFill>
-                <a:latin typeface="Calibri"/>
-              </a:rPr>
-              <a:t> y con qué resultado.</a:t>
-            </a:r>
-          </a:p>
-          <a:p>
-            <a:pPr lvl="1">
-              <a:spcAft>
-                <a:spcPts val="600"/>
-              </a:spcAft>
-            </a:pPr>
-            <a:r>
-              <a:rPr sz="1500" b="0" i="0">
-                <a:solidFill>
-                  <a:srgbClr val="2B2B2B"/>
-                </a:solidFill>
-                <a:latin typeface="Calibri"/>
-              </a:rPr>
-              <a:t>●   Sin esa revisión, un anteproyecto corre el riesgo de reinventar lo que ya está resuelto.</a:t>
-            </a:r>
-          </a:p>
-          <a:p>
-            <a:pPr>
-              <a:spcAft>
-                <a:spcPts val="1000"/>
-              </a:spcAft>
-            </a:pPr>
-            <a:r>
-              <a:rPr sz="1600" b="0" i="0">
-                <a:solidFill>
-                  <a:srgbClr val="2B2B2B"/>
-                </a:solidFill>
-                <a:latin typeface="Calibri"/>
-              </a:rPr>
-              <a:t>–   Caso de aula: un equipo propone un asistente de IA para clasificar tickets de soporte.</a:t>
-            </a:r>
-          </a:p>
-          <a:p>
-            <a:pPr lvl="1">
-              <a:spcAft>
-                <a:spcPts val="600"/>
-              </a:spcAft>
-            </a:pPr>
-            <a:r>
-              <a:rPr sz="1500" b="0" i="0">
-                <a:solidFill>
-                  <a:srgbClr val="2B2B2B"/>
-                </a:solidFill>
-                <a:latin typeface="Calibri"/>
-              </a:rPr>
-              <a:t>●   Al buscar en Scholar aparecen cinco estudios recientes sobre eso… y dos dicen exactamente dónde falla.</a:t>
-            </a:r>
-          </a:p>
-          <a:p>
-            <a:pPr lvl="1">
-              <a:spcAft>
-                <a:spcPts val="600"/>
-              </a:spcAft>
-            </a:pPr>
-            <a:r>
-              <a:rPr sz="1500" b="0" i="0">
-                <a:solidFill>
-                  <a:srgbClr val="2B2B2B"/>
-                </a:solidFill>
-                <a:latin typeface="Calibri"/>
-              </a:rPr>
-              <a:t>●   Ese hallazgo no arruina el proyecto: </a:t>
-            </a:r>
-            <a:r>
-              <a:rPr sz="1500" b="1" i="0">
-                <a:solidFill>
-                  <a:srgbClr val="2B2B2B"/>
-                </a:solidFill>
-                <a:latin typeface="Calibri"/>
-              </a:rPr>
-              <a:t>lo salva</a:t>
-            </a:r>
-            <a:r>
-              <a:rPr sz="1500" b="0" i="0">
-                <a:solidFill>
-                  <a:srgbClr val="2B2B2B"/>
-                </a:solidFill>
-                <a:latin typeface="Calibri"/>
-              </a:rPr>
-              <a:t>, porque le da un ángulo propio y defendible.</a:t>
-            </a:r>
-          </a:p>
-          <a:p>
-            <a:pPr>
-              <a:spcAft>
-                <a:spcPts val="1000"/>
-              </a:spcAft>
-            </a:pPr>
-            <a:r>
-              <a:rPr sz="1600" b="0" i="0">
-                <a:solidFill>
-                  <a:srgbClr val="2B2B2B"/>
-                </a:solidFill>
-                <a:latin typeface="Calibri"/>
-              </a:rPr>
-              <a:t>–   Los </a:t>
-            </a:r>
-            <a:r>
-              <a:rPr sz="1600" b="1" i="0">
-                <a:solidFill>
-                  <a:srgbClr val="2B2B2B"/>
-                </a:solidFill>
-                <a:latin typeface="Calibri"/>
-              </a:rPr>
-              <a:t>antecedentes</a:t>
-            </a:r>
-            <a:r>
-              <a:rPr sz="1600" b="0" i="0">
-                <a:solidFill>
-                  <a:srgbClr val="2B2B2B"/>
-                </a:solidFill>
-                <a:latin typeface="Calibri"/>
-              </a:rPr>
-              <a:t> son ese mapa de lo ya investigado. Hoy empezamos a construirlo.</a:t>
-            </a:r>
-          </a:p>
-          <a:p>
-            <a:pPr>
-              <a:spcAft>
-                <a:spcPts val="1000"/>
-              </a:spcAft>
-            </a:pPr>
-            <a:r>
-              <a:rPr sz="1600" b="0" i="0">
-                <a:solidFill>
-                  <a:srgbClr val="2B2B2B"/>
-                </a:solidFill>
-                <a:latin typeface="Calibri"/>
-              </a:rPr>
-              <a:t>–   Antes, veinte minutos sobre la retroalimentación de la primera entrega: los comentarios son instrucciones, no una nota disfrazada.</a:t>
-            </a:r>
-          </a:p>
-        </p:txBody>
-      </p:sp>
-      <p:sp>
-        <p:nvSpPr>
-          <p:cNvPr id="5" name="TextBox 4"/>
-          <p:cNvSpPr txBox="1"/>
-          <p:nvPr/>
-        </p:nvSpPr>
-        <p:spPr>
-          <a:xfrm>
-            <a:off x="11094415" y="6446520"/>
-            <a:ext cx="548640" cy="274320"/>
-          </a:xfrm>
-          <a:prstGeom prst="rect">
-            <a:avLst/>
-          </a:prstGeom>
-          <a:noFill/>
-        </p:spPr>
-        <p:txBody>
-          <a:bodyPr wrap="square" anchor="t" lIns="0" rIns="0" tIns="0" bIns="0">
-            <a:spAutoFit/>
-          </a:bodyPr>
-          <a:lstStyle/>
-          <a:p>
-            <a:pPr algn="r"/>
-            <a:r>
-              <a:rPr sz="1000" b="1" i="0">
-                <a:solidFill>
-                  <a:srgbClr val="8F989D"/>
-                </a:solidFill>
-                <a:latin typeface="Calibri"/>
-              </a:rPr>
-              <a:t>2</a:t>
-            </a:r>
-          </a:p>
-        </p:txBody>
-      </p:sp>
-      <p:sp>
-        <p:nvSpPr>
-          <p:cNvPr id="6" name="TextBox 5"/>
-          <p:cNvSpPr txBox="1"/>
-          <p:nvPr/>
-        </p:nvSpPr>
-        <p:spPr>
-          <a:xfrm>
-            <a:off x="640080" y="5943600"/>
-            <a:ext cx="9997135" cy="457200"/>
-          </a:xfrm>
-          <a:prstGeom prst="rect">
-            <a:avLst/>
-          </a:prstGeom>
-          <a:noFill/>
-        </p:spPr>
-        <p:txBody>
-          <a:bodyPr wrap="square" anchor="t" lIns="0" rIns="0" tIns="0" bIns="0">
-            <a:spAutoFit/>
-          </a:bodyPr>
-          <a:lstStyle/>
-          <a:p>
-            <a:r>
-              <a:rPr sz="1200" b="0" i="1">
-                <a:solidFill>
-                  <a:srgbClr val="2B2B2B"/>
-                </a:solidFill>
-                <a:latin typeface="Calibri"/>
-              </a:rPr>
-              <a:t>Meta orientativa del programa: </a:t>
-            </a:r>
-            <a:r>
-              <a:rPr sz="1200" b="1" i="1">
-                <a:solidFill>
-                  <a:srgbClr val="2B2B2B"/>
-                </a:solidFill>
-                <a:latin typeface="Calibri"/>
-              </a:rPr>
-              <a:t>mínimo 6 antecedentes</a:t>
-            </a:r>
-            <a:r>
-              <a:rPr sz="1200" b="0" i="1">
-                <a:solidFill>
-                  <a:srgbClr val="2B2B2B"/>
-                </a:solidFill>
-                <a:latin typeface="Calibri"/>
-              </a:rPr>
-              <a:t>, mezclando estudios nacionales e internacionales.</a:t>
             </a:r>
           </a:p>
         </p:txBody>
